--- a/presentations/PR_L05_ConditionControlledLoops_Lesson.pptx
+++ b/presentations/PR_L05_ConditionControlledLoops_Lesson.pptx
@@ -2167,7 +2167,7 @@
                 <a:ea typeface="IBM Plex Sans" pitchFamily="34" charset="-122"/>
                 <a:cs typeface="IBM Plex Sans" pitchFamily="34" charset="-120"/>
               </a:rPr>
-              <a:t>Sometimes a program cannot know how many repeats it needs until it is already running. In the waiting room you will write condition-controlled loops that keep going until something changes.</a:t>
+              <a:t>Sometimes a program cannot know how many repeats it needs until it is already running. Work through the six stations and you will write condition-controlled loops that keep going until something changes.</a:t>
             </a:r>
             <a:endParaRPr lang="en-US" sz="1800" dirty="0"/>
           </a:p>
@@ -2593,7 +2593,7 @@
                 <a:ea typeface="IBM Plex Sans" pitchFamily="34" charset="-122"/>
                 <a:cs typeface="IBM Plex Sans" pitchFamily="34" charset="-120"/>
               </a:rPr>
-              <a:t>One while loop can both validate what comes in and gather the figures you need.</a:t>
+              <a:t>One while loop can both check what comes in and gather the figures you need.</a:t>
             </a:r>
             <a:endParaRPr lang="en-US" sz="1700" dirty="0"/>
           </a:p>
@@ -2617,7 +2617,7 @@
                 <a:ea typeface="IBM Plex Sans" pitchFamily="34" charset="-122"/>
                 <a:cs typeface="IBM Plex Sans" pitchFamily="34" charset="-120"/>
               </a:rPr>
-              <a:t>Common mistake: reporting inside the loop, which prints a line for every item read.</a:t>
+              <a:t>Common mistake: reporting inside the loop, which prints a line for every value read.</a:t>
             </a:r>
             <a:endParaRPr lang="en-US" sz="1700" dirty="0"/>
           </a:p>
@@ -2725,7 +2725,7 @@
                 <a:ea typeface="IBM Plex Sans" pitchFamily="34" charset="-122"/>
                 <a:cs typeface="IBM Plex Sans" pitchFamily="34" charset="-120"/>
               </a:rPr>
-              <a:t>Plan the variables a swimming session report needs before its loop starts.</a:t>
+              <a:t>What should a program print when the sentinel is the very first thing typed?</a:t>
             </a:r>
             <a:endParaRPr lang="en-US" sz="1600" dirty="0"/>
           </a:p>
@@ -2805,7 +2805,7 @@
                 <a:ea typeface="IBM Plex Sans" pitchFamily="34" charset="-122"/>
                 <a:cs typeface="IBM Plex Sans" pitchFamily="34" charset="-120"/>
               </a:rPr>
-              <a:t>A loop that reads until a sentinel copes with no data at all, as long as the totals start at zero.</a:t>
+              <a:t>A loop that reads until a sentinel copes with no data at all, as long as the totals start at...</a:t>
             </a:r>
             <a:endParaRPr lang="en-US" sz="1600" dirty="0"/>
           </a:p>
@@ -3104,7 +3104,7 @@
                 <a:ea typeface="IBM Plex Sans" pitchFamily="34" charset="-122"/>
                 <a:cs typeface="IBM Plex Sans" pitchFamily="34" charset="-120"/>
               </a:rPr>
-              <a:t>Eight jobs are waiting. Tap the star and decide whether each one needs a count-controlled for loop or a condition-controlled while loop.</a:t>
+              <a:t>Eight jobs are waiting on the floor below you. Tap the star and decide whether each one needs a count-controlled for loop or a condition-controlled while loop.</a:t>
             </a:r>
             <a:endParaRPr lang="en-US" sz="2200" dirty="0"/>
           </a:p>
@@ -3675,7 +3675,7 @@
                 <a:ea typeface="IBM Plex Sans" pitchFamily="34" charset="-122"/>
                 <a:cs typeface="IBM Plex Sans" pitchFamily="34" charset="-120"/>
               </a:rPr>
-              <a:t>-1 works for a price, because a price can never be negative. For a temperature it would be a terrible choice.</a:t>
+              <a:t>-1 works when the real values can never be negative. For a temperature it would be a terrible choice.</a:t>
             </a:r>
             <a:endParaRPr lang="en-US" sz="1300" dirty="0"/>
           </a:p>
@@ -4060,7 +4060,7 @@
                 <a:ea typeface="IBM Plex Sans" pitchFamily="34" charset="-122"/>
                 <a:cs typeface="IBM Plex Sans" pitchFamily="34" charset="-120"/>
               </a:rPr>
-              <a:t>A validation loop reads a number, then repeats for as long as it is outside 1 to 50. When 99 is typed the program reports the same wrong number over and over. State what has been left out of the loop, and where in the loop it belongs.</a:t>
+              <a:t>A validation loop reads a whole number, then repeats for as long as it is outside 1 to 20. When 99 is typed the program prints out of range over and over. State what has been left out of the loop, and where in the loop it belongs.</a:t>
             </a:r>
             <a:endParaRPr lang="en-US" sz="1700" dirty="0"/>
           </a:p>
@@ -4190,7 +4190,7 @@
                 <a:ea typeface="IBM Plex Sans" pitchFamily="34" charset="-122"/>
                 <a:cs typeface="IBM Plex Sans" pitchFamily="34" charset="-120"/>
               </a:rPr>
-              <a:t>Write a program that reads lengths of rope in centimetres until 0 is typed, then prints how many lengths were read and their total length.</a:t>
+              <a:t>Write a program that reads whole numbers until -1 is typed, then prints how many numbers were read and their total.</a:t>
             </a:r>
             <a:endParaRPr lang="en-US" sz="1700" dirty="0"/>
           </a:p>
@@ -4320,7 +4320,7 @@
                 <a:ea typeface="IBM Plex Sans" pitchFamily="34" charset="-122"/>
                 <a:cs typeface="IBM Plex Sans" pitchFamily="34" charset="-120"/>
               </a:rPr>
-              <a:t>Write a program that keeps asking for a password until one of at least 8 characters is typed, and then prints Accepted.</a:t>
+              <a:t>Write a program that keeps asking for a word until yes or no is typed, printing please answer yes or no for every other word, and then prints the word that was accepted.</a:t>
             </a:r>
             <a:endParaRPr lang="en-US" sz="1700" dirty="0"/>
           </a:p>
@@ -7961,7 +7961,7 @@
                 <a:ea typeface="IBM Plex Sans" pitchFamily="34" charset="-122"/>
                 <a:cs typeface="IBM Plex Sans" pitchFamily="34" charset="-120"/>
               </a:rPr>
-              <a:t>A loop whose condition never becomes False is an infinite loop, and it will freeze the program.</a:t>
+              <a:t>A loop whose condition never becomes False will freeze the program, and is called an...</a:t>
             </a:r>
             <a:endParaRPr lang="en-US" sz="1600" dirty="0"/>
           </a:p>
@@ -8537,7 +8537,7 @@
                 <a:ea typeface="IBM Plex Sans" pitchFamily="34" charset="-122"/>
                 <a:cs typeface="IBM Plex Sans" pitchFamily="34" charset="-120"/>
               </a:rPr>
-              <a:t>This shape has a name of its own: input validation, which is the heart of topic 2.3.</a:t>
+              <a:t>A loop that keeps asking until the value is acceptable has a name of its own, and it is the heart of topic 2.3:...</a:t>
             </a:r>
             <a:endParaRPr lang="en-US" sz="1600" dirty="0"/>
           </a:p>
@@ -8901,7 +8901,7 @@
                 <a:ea typeface="IBM Plex Sans" pitchFamily="34" charset="-122"/>
                 <a:cs typeface="IBM Plex Sans" pitchFamily="34" charset="-120"/>
               </a:rPr>
-              <a:t>The loop keeps going until the sentinel arrives, however many items came before it.</a:t>
+              <a:t>The loop keeps going until the sentinel arrives, however many values came before it.</a:t>
             </a:r>
             <a:endParaRPr lang="en-US" sz="1700" dirty="0"/>
           </a:p>
@@ -9113,7 +9113,7 @@
                 <a:ea typeface="IBM Plex Sans" pitchFamily="34" charset="-122"/>
                 <a:cs typeface="IBM Plex Sans" pitchFamily="34" charset="-120"/>
               </a:rPr>
-              <a:t>Sentinel means guard: the value stands at the end of the data keeping watch.</a:t>
+              <a:t>Sentinel means guard, because the value stands at the end of the data...</a:t>
             </a:r>
             <a:endParaRPr lang="en-US" sz="1600" dirty="0"/>
           </a:p>
@@ -9477,7 +9477,7 @@
                 <a:ea typeface="IBM Plex Sans" pitchFamily="34" charset="-122"/>
                 <a:cs typeface="IBM Plex Sans" pitchFamily="34" charset="-120"/>
               </a:rPr>
-              <a:t>The same pass can count the items and test each one against a rule.</a:t>
+              <a:t>The same pass can count the values and test each one against a rule.</a:t>
             </a:r>
             <a:endParaRPr lang="en-US" sz="1700" dirty="0"/>
           </a:p>
@@ -9609,7 +9609,7 @@
                 <a:ea typeface="IBM Plex Sans" pitchFamily="34" charset="-122"/>
                 <a:cs typeface="IBM Plex Sans" pitchFamily="34" charset="-120"/>
               </a:rPr>
-              <a:t>How would you count how many of the scores read reached 40?</a:t>
+              <a:t>How would you count how many of the numbers read reached 40?</a:t>
             </a:r>
             <a:endParaRPr lang="en-US" sz="1600" dirty="0"/>
           </a:p>
@@ -9689,7 +9689,7 @@
                 <a:ea typeface="IBM Plex Sans" pitchFamily="34" charset="-122"/>
                 <a:cs typeface="IBM Plex Sans" pitchFamily="34" charset="-120"/>
               </a:rPr>
-              <a:t>A while loop with a counter can do anything a for loop can, but a for loop says it more clearly.</a:t>
+              <a:t>A while loop with a counter can do anything a for loop can, but a for loop says it more...</a:t>
             </a:r>
             <a:endParaRPr lang="en-US" sz="1600" dirty="0"/>
           </a:p>
@@ -10185,7 +10185,7 @@
                 <a:ea typeface="IBM Plex Sans" pitchFamily="34" charset="-122"/>
                 <a:cs typeface="IBM Plex Sans" pitchFamily="34" charset="-120"/>
               </a:rPr>
-              <a:t>Which loop would you use to read a known number of parcel weights?</a:t>
+              <a:t>Which kind of loop does a program need when it cannot know how many repeats there will be?</a:t>
             </a:r>
             <a:endParaRPr lang="en-US" sz="1600" dirty="0"/>
           </a:p>
@@ -10265,7 +10265,7 @@
                 <a:ea typeface="IBM Plex Sans" pitchFamily="34" charset="-122"/>
                 <a:cs typeface="IBM Plex Sans" pitchFamily="34" charset="-120"/>
               </a:rPr>
-              <a:t>Both kinds are called iteration, and the exam expects you to name which one you have used.</a:t>
+              <a:t>Both for and while are kinds of iteration, so in the exam you must name the kind you have...</a:t>
             </a:r>
             <a:endParaRPr lang="en-US" sz="1600" dirty="0"/>
           </a:p>

--- a/presentations/PR_L05_ConditionControlledLoops_Lesson.pptx
+++ b/presentations/PR_L05_ConditionControlledLoops_Lesson.pptx
@@ -19,9 +19,10 @@
     <p:sldId id="267" r:id="rId13"/>
     <p:sldId id="268" r:id="rId14"/>
     <p:sldId id="269" r:id="rId15"/>
+    <p:sldId id="270" r:id="rId16"/>
   </p:sldIdLst>
   <p:notesMasterIdLst>
-    <p:notesMasterId r:id="rId16"/>
+    <p:notesMasterId r:id="rId17"/>
   </p:notesMasterIdLst>
   <p:sldSz cx="12192000" cy="6858000"/>
   <p:notesSz cx="6858000" cy="12192000"/>
@@ -692,7 +693,13 @@
           <a:p>
             <a:r>
               <a:rPr lang="en-US" dirty="0"/>
-              <a:t>Make them commit to an answer on paper before they tap the star. Guessing first costs them the learning.</a:t>
+              <a:t>The answer is B: 2.
+Do not say it yet. Every pupil commits first - fingers, whiteboards or a show of hands on each letter in turn - and you count the split before anyone can change their mind.
+IF MOST OF THE CLASS IS RIGHT: say why it is right in one sentence and go straight on to the independent work.
+IF A SIGNIFICANT GROUP IS ON ONE WRONG LETTER: that option is the misconception to teach against before anyone goes on. Go back to station 4, Counting inside a while, and work through its example again, aloud, with the class watching, then re-ask this question.
+The course's own response to a wrong answer here: n goes 1, 3, 5. The loop runs twice, because 5 is not below 5, so the counter reaches 2.
+A limitation, stated rather than papered over: one response covers every wrong option; it does not say what to revisit for each one. The course does not record what each separate wrong option means, and this slide does not invent it. Decide your own reteach for each option before the lesson; the options above are the start of it.
+This is a real activity from the experience (pr-l05-s4-c2), so the wording here is the wording a pupil will see.</a:t>
             </a:r>
             <a:endParaRPr lang="en-US" dirty="0"/>
           </a:p>
@@ -780,7 +787,7 @@
           <a:p>
             <a:r>
               <a:rPr lang="en-US" dirty="0"/>
-              <a:t>Use these as a settler, or as something for early finishers to read in the experience.</a:t>
+              <a:t>Make them commit to an answer on paper before they tap the star. Guessing first costs them the learning.</a:t>
             </a:r>
             <a:endParaRPr lang="en-US" dirty="0"/>
           </a:p>
@@ -868,7 +875,7 @@
           <a:p>
             <a:r>
               <a:rPr lang="en-US" dirty="0"/>
-              <a:t>Timed and silent. Mark against the answer sheet, then ask students to record their weakest area.</a:t>
+              <a:t>Use these as a settler, or as something for early finishers to read in the experience.</a:t>
             </a:r>
             <a:endParaRPr lang="en-US" dirty="0"/>
           </a:p>
@@ -956,7 +963,7 @@
           <a:p>
             <a:r>
               <a:rPr lang="en-US" dirty="0"/>
-              <a:t>Students copy their score-screen breakdown onto the worksheet, then rate themselves here.</a:t>
+              <a:t>Timed and silent. Mark against the answer sheet, then ask students to record their weakest area.</a:t>
             </a:r>
             <a:endParaRPr lang="en-US" dirty="0"/>
           </a:p>
@@ -980,6 +987,94 @@
             <a:fld id="{F7021451-1387-4CA6-816F-3879F97B5CBC}" type="slidenum">
               <a:rPr lang="en-US"/>
               <a:t>14</a:t>
+            </a:fld>
+            <a:endParaRPr lang="en-US"/>
+          </a:p>
+        </p:txBody>
+      </p:sp>
+    </p:spTree>
+    <p:extLst>
+      <p:ext uri="{BB962C8B-B14F-4D97-AF65-F5344CB8AC3E}">
+        <p14:creationId xmlns:p14="http://schemas.microsoft.com/office/powerpoint/2010/main" val="1024086991"/>
+      </p:ext>
+    </p:extLst>
+  </p:cSld>
+  <p:clrMapOvr>
+    <a:masterClrMapping/>
+  </p:clrMapOvr>
+</p:notes>
+</file>
+
+<file path=ppt/notesSlides/notesSlide15.xml><?xml version="1.0" encoding="utf-8"?>
+<p:notes xmlns:a="http://schemas.openxmlformats.org/drawingml/2006/main" xmlns:r="http://schemas.openxmlformats.org/officeDocument/2006/relationships" xmlns:p="http://schemas.openxmlformats.org/presentationml/2006/main">
+  <p:cSld>
+    <p:spTree>
+      <p:nvGrpSpPr>
+        <p:cNvPr id="1" name=""/>
+        <p:cNvGrpSpPr/>
+        <p:nvPr/>
+      </p:nvGrpSpPr>
+      <p:grpSpPr>
+        <a:xfrm>
+          <a:off x="0" y="0"/>
+          <a:ext cx="0" cy="0"/>
+          <a:chOff x="0" y="0"/>
+          <a:chExt cx="0" cy="0"/>
+        </a:xfrm>
+      </p:grpSpPr>
+      <p:sp>
+        <p:nvSpPr>
+          <p:cNvPr id="2" name="Slide Image Placeholder 1"/>
+          <p:cNvSpPr>
+            <a:spLocks noGrp="1" noRot="1" noChangeAspect="1"/>
+          </p:cNvSpPr>
+          <p:nvPr>
+            <p:ph type="sldImg"/>
+          </p:nvPr>
+        </p:nvSpPr>
+        <p:spPr/>
+      </p:sp>
+      <p:sp>
+        <p:nvSpPr>
+          <p:cNvPr id="3" name="Notes Placeholder 2"/>
+          <p:cNvSpPr>
+            <a:spLocks noGrp="1"/>
+          </p:cNvSpPr>
+          <p:nvPr>
+            <p:ph type="body" idx="1"/>
+          </p:nvPr>
+        </p:nvSpPr>
+        <p:spPr/>
+        <p:txBody>
+          <a:bodyPr/>
+          <a:lstStyle/>
+          <a:p>
+            <a:r>
+              <a:rPr lang="en-US" dirty="0"/>
+              <a:t>Students copy their score-screen breakdown onto the worksheet, then rate themselves here.</a:t>
+            </a:r>
+            <a:endParaRPr lang="en-US" dirty="0"/>
+          </a:p>
+        </p:txBody>
+      </p:sp>
+      <p:sp>
+        <p:nvSpPr>
+          <p:cNvPr id="4" name="Slide Number Placeholder 3"/>
+          <p:cNvSpPr>
+            <a:spLocks noGrp="1"/>
+          </p:cNvSpPr>
+          <p:nvPr>
+            <p:ph type="sldNum" sz="quarter" idx="10"/>
+          </p:nvPr>
+        </p:nvSpPr>
+        <p:spPr/>
+        <p:txBody>
+          <a:bodyPr/>
+          <a:lstStyle/>
+          <a:p>
+            <a:fld id="{F7021451-1387-4CA6-816F-3879F97B5CBC}" type="slidenum">
+              <a:rPr lang="en-US"/>
+              <a:t>15</a:t>
             </a:fld>
             <a:endParaRPr lang="en-US"/>
           </a:p>
@@ -2949,12 +3044,12 @@
         </p:nvSpPr>
         <p:spPr>
           <a:xfrm>
-            <a:off x="502920" y="438912"/>
-            <a:ext cx="3108960" cy="502920"/>
+            <a:off x="502920" y="457200"/>
+            <a:ext cx="1051560" cy="420624"/>
           </a:xfrm>
           <a:prstGeom prst="roundRect">
             <a:avLst>
-              <a:gd name="adj" fmla="val 18182"/>
+              <a:gd name="adj" fmla="val 21739"/>
             </a:avLst>
           </a:prstGeom>
           <a:solidFill>
@@ -2971,8 +3066,8 @@
         </p:nvSpPr>
         <p:spPr>
           <a:xfrm>
-            <a:off x="502920" y="438912"/>
-            <a:ext cx="3108960" cy="502920"/>
+            <a:off x="502920" y="457200"/>
+            <a:ext cx="1051560" cy="420624"/>
           </a:xfrm>
           <a:prstGeom prst="rect">
             <a:avLst/>
@@ -2988,7 +3083,7 @@
               <a:buNone/>
             </a:pPr>
             <a:r>
-              <a:rPr lang="en-US" sz="1300" b="1" dirty="0">
+              <a:rPr lang="en-US" sz="1200" b="1" dirty="0">
                 <a:solidFill>
                   <a:srgbClr val="101828"/>
                 </a:solidFill>
@@ -2996,9 +3091,9 @@
                 <a:ea typeface="IBM Plex Mono" pitchFamily="34" charset="-122"/>
                 <a:cs typeface="IBM Plex Mono" pitchFamily="34" charset="-120"/>
               </a:rPr>
-              <a:t>★  FINAL CHALLENGE</a:t>
-            </a:r>
-            <a:endParaRPr lang="en-US" sz="1300" dirty="0"/>
+              <a:t>CHECK</a:t>
+            </a:r>
+            <a:endParaRPr lang="en-US" sz="1200" dirty="0"/>
           </a:p>
         </p:txBody>
       </p:sp>
@@ -3010,8 +3105,8 @@
         </p:nvSpPr>
         <p:spPr>
           <a:xfrm>
-            <a:off x="502920" y="1097280"/>
-            <a:ext cx="11155680" cy="731520"/>
+            <a:off x="1737360" y="457200"/>
+            <a:ext cx="9875520" cy="420624"/>
           </a:xfrm>
           <a:prstGeom prst="rect">
             <a:avLst/>
@@ -3027,34 +3122,76 @@
               <a:buNone/>
             </a:pPr>
             <a:r>
-              <a:rPr lang="en-US" sz="3400" b="1" dirty="0">
-                <a:solidFill>
-                  <a:srgbClr val="101828"/>
+              <a:rPr lang="en-US" sz="1500" dirty="0">
+                <a:solidFill>
+                  <a:srgbClr val="667085"/>
                 </a:solidFill>
                 <a:latin typeface="IBM Plex Sans" pitchFamily="34" charset="0"/>
                 <a:ea typeface="IBM Plex Sans" pitchFamily="34" charset="-122"/>
                 <a:cs typeface="IBM Plex Sans" pitchFamily="34" charset="-120"/>
               </a:rPr>
-              <a:t>For or while?</a:t>
-            </a:r>
-            <a:endParaRPr lang="en-US" sz="3400" dirty="0"/>
-          </a:p>
-        </p:txBody>
-      </p:sp>
-      <p:sp>
-        <p:nvSpPr>
-          <p:cNvPr id="8" name="Shape 6"/>
+              <a:t>Hands down. Everyone commits.</a:t>
+            </a:r>
+            <a:endParaRPr lang="en-US" sz="1500" dirty="0"/>
+          </a:p>
+        </p:txBody>
+      </p:sp>
+      <p:sp>
+        <p:nvSpPr>
+          <p:cNvPr id="8" name="Text 6"/>
+          <p:cNvSpPr txBox="1"/>
+          <p:nvPr/>
+        </p:nvSpPr>
+        <p:spPr>
+          <a:xfrm>
+            <a:off x="502920" y="1097280"/>
+            <a:ext cx="11155680" cy="914400"/>
+          </a:xfrm>
+          <a:prstGeom prst="rect">
+            <a:avLst/>
+          </a:prstGeom>
+          <a:noFill/>
+          <a:ln/>
+        </p:spPr>
+        <p:txBody>
+          <a:bodyPr wrap="square" lIns="0" tIns="0" rIns="0" bIns="0" rtlCol="0" anchor="ctr"/>
+          <a:lstStyle/>
+          <a:p>
+            <a:pPr indent="0" marL="0">
+              <a:lnSpc>
+                <a:spcPct val="115000"/>
+              </a:lnSpc>
+              <a:buNone/>
+            </a:pPr>
+            <a:r>
+              <a:rPr lang="en-US" sz="2600" b="1" dirty="0">
+                <a:solidFill>
+                  <a:srgbClr val="101828"/>
+                </a:solidFill>
+                <a:latin typeface="IBM Plex Sans" pitchFamily="34" charset="0"/>
+                <a:ea typeface="IBM Plex Sans" pitchFamily="34" charset="-122"/>
+                <a:cs typeface="IBM Plex Sans" pitchFamily="34" charset="-120"/>
+              </a:rPr>
+              <a:t>What will this program display?</a:t>
+            </a:r>
+            <a:endParaRPr lang="en-US" sz="2600" dirty="0"/>
+          </a:p>
+        </p:txBody>
+      </p:sp>
+      <p:sp>
+        <p:nvSpPr>
+          <p:cNvPr id="9" name="Shape 7"/>
           <p:cNvSpPr/>
           <p:nvPr/>
         </p:nvSpPr>
         <p:spPr>
           <a:xfrm>
-            <a:off x="502920" y="2011680"/>
-            <a:ext cx="11155680" cy="2194560"/>
+            <a:off x="502920" y="2148840"/>
+            <a:ext cx="5029200" cy="2103120"/>
           </a:xfrm>
           <a:prstGeom prst="roundRect">
             <a:avLst>
-              <a:gd name="adj" fmla="val 5000"/>
+              <a:gd name="adj" fmla="val 5217"/>
             </a:avLst>
           </a:prstGeom>
           <a:solidFill>
@@ -3062,7 +3199,7 @@
           </a:solidFill>
           <a:ln w="15875">
             <a:solidFill>
-              <a:srgbClr val="2D63FF"/>
+              <a:srgbClr val="D9DEE7"/>
             </a:solidFill>
             <a:prstDash val="solid"/>
           </a:ln>
@@ -3070,33 +3207,263 @@
       </p:sp>
       <p:sp>
         <p:nvSpPr>
-          <p:cNvPr id="9" name="Text 7"/>
-          <p:cNvSpPr txBox="1"/>
-          <p:nvPr/>
-        </p:nvSpPr>
-        <p:spPr>
-          <a:xfrm>
-            <a:off x="1005840" y="2331720"/>
-            <a:ext cx="10149840" cy="1554480"/>
-          </a:xfrm>
-          <a:prstGeom prst="rect">
-            <a:avLst/>
-          </a:prstGeom>
-          <a:noFill/>
-          <a:ln/>
-        </p:spPr>
-        <p:txBody>
-          <a:bodyPr wrap="square" lIns="0" tIns="0" rIns="0" bIns="0" rtlCol="0" anchor="ctr"/>
+          <p:cNvPr id="10" name="Text 8"/>
+          <p:cNvSpPr txBox="1"/>
+          <p:nvPr/>
+        </p:nvSpPr>
+        <p:spPr>
+          <a:xfrm>
+            <a:off x="822960" y="2350008"/>
+            <a:ext cx="4480560" cy="1700784"/>
+          </a:xfrm>
+          <a:prstGeom prst="rect">
+            <a:avLst/>
+          </a:prstGeom>
+          <a:noFill/>
+          <a:ln/>
+        </p:spPr>
+        <p:txBody>
+          <a:bodyPr wrap="square" lIns="0" tIns="0" rIns="0" bIns="0" rtlCol="0" anchor="t"/>
           <a:lstStyle/>
           <a:p>
             <a:pPr indent="0" marL="0">
               <a:lnSpc>
-                <a:spcPct val="130000"/>
+                <a:spcPct val="125000"/>
               </a:lnSpc>
               <a:buNone/>
             </a:pPr>
             <a:r>
-              <a:rPr lang="en-US" sz="2200" dirty="0">
+              <a:rPr lang="en-US" sz="1500" dirty="0">
+                <a:solidFill>
+                  <a:srgbClr val="101828"/>
+                </a:solidFill>
+                <a:latin typeface="IBM Plex Mono" pitchFamily="34" charset="0"/>
+                <a:ea typeface="IBM Plex Mono" pitchFamily="34" charset="-122"/>
+                <a:cs typeface="IBM Plex Mono" pitchFamily="34" charset="-120"/>
+              </a:rPr>
+              <a:t>count = 0</a:t>
+            </a:r>
+            <a:endParaRPr lang="en-US" sz="1500" dirty="0"/>
+          </a:p>
+          <a:p>
+            <a:pPr indent="0" marL="0">
+              <a:lnSpc>
+                <a:spcPct val="125000"/>
+              </a:lnSpc>
+              <a:buNone/>
+            </a:pPr>
+            <a:r>
+              <a:rPr lang="en-US" sz="1500" dirty="0">
+                <a:solidFill>
+                  <a:srgbClr val="101828"/>
+                </a:solidFill>
+                <a:latin typeface="IBM Plex Mono" pitchFamily="34" charset="0"/>
+                <a:ea typeface="IBM Plex Mono" pitchFamily="34" charset="-122"/>
+                <a:cs typeface="IBM Plex Mono" pitchFamily="34" charset="-120"/>
+              </a:rPr>
+              <a:t>n = 1</a:t>
+            </a:r>
+            <a:endParaRPr lang="en-US" sz="1500" dirty="0"/>
+          </a:p>
+          <a:p>
+            <a:pPr indent="0" marL="0">
+              <a:lnSpc>
+                <a:spcPct val="125000"/>
+              </a:lnSpc>
+              <a:buNone/>
+            </a:pPr>
+            <a:r>
+              <a:rPr lang="en-US" sz="1500" dirty="0">
+                <a:solidFill>
+                  <a:srgbClr val="101828"/>
+                </a:solidFill>
+                <a:latin typeface="IBM Plex Mono" pitchFamily="34" charset="0"/>
+                <a:ea typeface="IBM Plex Mono" pitchFamily="34" charset="-122"/>
+                <a:cs typeface="IBM Plex Mono" pitchFamily="34" charset="-120"/>
+              </a:rPr>
+              <a:t>while n &lt; 5:</a:t>
+            </a:r>
+            <a:endParaRPr lang="en-US" sz="1500" dirty="0"/>
+          </a:p>
+          <a:p>
+            <a:pPr indent="0" marL="0">
+              <a:lnSpc>
+                <a:spcPct val="125000"/>
+              </a:lnSpc>
+              <a:buNone/>
+            </a:pPr>
+            <a:r>
+              <a:rPr lang="en-US" sz="1500" dirty="0">
+                <a:solidFill>
+                  <a:srgbClr val="101828"/>
+                </a:solidFill>
+                <a:latin typeface="IBM Plex Mono" pitchFamily="34" charset="0"/>
+                <a:ea typeface="IBM Plex Mono" pitchFamily="34" charset="-122"/>
+                <a:cs typeface="IBM Plex Mono" pitchFamily="34" charset="-120"/>
+              </a:rPr>
+              <a:t>    count = count + 1</a:t>
+            </a:r>
+            <a:endParaRPr lang="en-US" sz="1500" dirty="0"/>
+          </a:p>
+          <a:p>
+            <a:pPr indent="0" marL="0">
+              <a:lnSpc>
+                <a:spcPct val="125000"/>
+              </a:lnSpc>
+              <a:buNone/>
+            </a:pPr>
+            <a:r>
+              <a:rPr lang="en-US" sz="1500" dirty="0">
+                <a:solidFill>
+                  <a:srgbClr val="101828"/>
+                </a:solidFill>
+                <a:latin typeface="IBM Plex Mono" pitchFamily="34" charset="0"/>
+                <a:ea typeface="IBM Plex Mono" pitchFamily="34" charset="-122"/>
+                <a:cs typeface="IBM Plex Mono" pitchFamily="34" charset="-120"/>
+              </a:rPr>
+              <a:t>    n = n + 2</a:t>
+            </a:r>
+            <a:endParaRPr lang="en-US" sz="1500" dirty="0"/>
+          </a:p>
+          <a:p>
+            <a:pPr indent="0" marL="0">
+              <a:lnSpc>
+                <a:spcPct val="125000"/>
+              </a:lnSpc>
+              <a:buNone/>
+            </a:pPr>
+            <a:r>
+              <a:rPr lang="en-US" sz="1500" dirty="0">
+                <a:solidFill>
+                  <a:srgbClr val="101828"/>
+                </a:solidFill>
+                <a:latin typeface="IBM Plex Mono" pitchFamily="34" charset="0"/>
+                <a:ea typeface="IBM Plex Mono" pitchFamily="34" charset="-122"/>
+                <a:cs typeface="IBM Plex Mono" pitchFamily="34" charset="-120"/>
+              </a:rPr>
+              <a:t>print(count)</a:t>
+            </a:r>
+            <a:endParaRPr lang="en-US" sz="1500" dirty="0"/>
+          </a:p>
+        </p:txBody>
+      </p:sp>
+      <p:sp>
+        <p:nvSpPr>
+          <p:cNvPr id="11" name="Shape 9"/>
+          <p:cNvSpPr/>
+          <p:nvPr/>
+        </p:nvSpPr>
+        <p:spPr>
+          <a:xfrm>
+            <a:off x="5806440" y="2148840"/>
+            <a:ext cx="5852160" cy="731520"/>
+          </a:xfrm>
+          <a:prstGeom prst="roundRect">
+            <a:avLst>
+              <a:gd name="adj" fmla="val 15000"/>
+            </a:avLst>
+          </a:prstGeom>
+          <a:solidFill>
+            <a:srgbClr val="FFFFFF"/>
+          </a:solidFill>
+          <a:ln w="15875">
+            <a:solidFill>
+              <a:srgbClr val="D9DEE7"/>
+            </a:solidFill>
+            <a:prstDash val="solid"/>
+          </a:ln>
+        </p:spPr>
+      </p:sp>
+      <p:sp>
+        <p:nvSpPr>
+          <p:cNvPr id="12" name="Shape 10"/>
+          <p:cNvSpPr/>
+          <p:nvPr/>
+        </p:nvSpPr>
+        <p:spPr>
+          <a:xfrm>
+            <a:off x="6080760" y="2295144"/>
+            <a:ext cx="438912" cy="438912"/>
+          </a:xfrm>
+          <a:prstGeom prst="roundRect">
+            <a:avLst>
+              <a:gd name="adj" fmla="val 20833"/>
+            </a:avLst>
+          </a:prstGeom>
+          <a:solidFill>
+            <a:srgbClr val="EEF2FB"/>
+          </a:solidFill>
+          <a:ln/>
+        </p:spPr>
+      </p:sp>
+      <p:sp>
+        <p:nvSpPr>
+          <p:cNvPr id="13" name="Text 11"/>
+          <p:cNvSpPr txBox="1"/>
+          <p:nvPr/>
+        </p:nvSpPr>
+        <p:spPr>
+          <a:xfrm>
+            <a:off x="6080760" y="2295144"/>
+            <a:ext cx="438912" cy="438912"/>
+          </a:xfrm>
+          <a:prstGeom prst="rect">
+            <a:avLst/>
+          </a:prstGeom>
+          <a:noFill/>
+          <a:ln/>
+        </p:spPr>
+        <p:txBody>
+          <a:bodyPr wrap="square" lIns="0" tIns="0" rIns="0" bIns="0" rtlCol="0" anchor="ctr"/>
+          <a:lstStyle/>
+          <a:p>
+            <a:pPr algn="ctr" indent="0" marL="0">
+              <a:buNone/>
+            </a:pPr>
+            <a:r>
+              <a:rPr lang="en-US" sz="1300" b="1" dirty="0">
+                <a:solidFill>
+                  <a:srgbClr val="2D63FF"/>
+                </a:solidFill>
+                <a:latin typeface="IBM Plex Mono" pitchFamily="34" charset="0"/>
+                <a:ea typeface="IBM Plex Mono" pitchFamily="34" charset="-122"/>
+                <a:cs typeface="IBM Plex Mono" pitchFamily="34" charset="-120"/>
+              </a:rPr>
+              <a:t>A</a:t>
+            </a:r>
+            <a:endParaRPr lang="en-US" sz="1300" dirty="0"/>
+          </a:p>
+        </p:txBody>
+      </p:sp>
+      <p:sp>
+        <p:nvSpPr>
+          <p:cNvPr id="14" name="Text 12"/>
+          <p:cNvSpPr txBox="1"/>
+          <p:nvPr/>
+        </p:nvSpPr>
+        <p:spPr>
+          <a:xfrm>
+            <a:off x="6720840" y="2148840"/>
+            <a:ext cx="4754880" cy="731520"/>
+          </a:xfrm>
+          <a:prstGeom prst="rect">
+            <a:avLst/>
+          </a:prstGeom>
+          <a:noFill/>
+          <a:ln/>
+        </p:spPr>
+        <p:txBody>
+          <a:bodyPr wrap="square" lIns="0" tIns="0" rIns="0" bIns="0" rtlCol="0" anchor="ctr"/>
+          <a:lstStyle/>
+          <a:p>
+            <a:pPr indent="0" marL="0">
+              <a:lnSpc>
+                <a:spcPct val="115000"/>
+              </a:lnSpc>
+              <a:buNone/>
+            </a:pPr>
+            <a:r>
+              <a:rPr lang="en-US" sz="1700" dirty="0">
                 <a:solidFill>
                   <a:srgbClr val="101828"/>
                 </a:solidFill>
@@ -3104,22 +3471,110 @@
                 <a:ea typeface="IBM Plex Sans" pitchFamily="34" charset="-122"/>
                 <a:cs typeface="IBM Plex Sans" pitchFamily="34" charset="-120"/>
               </a:rPr>
-              <a:t>Eight jobs are waiting on the floor below you. Tap the star and decide whether each one needs a count-controlled for loop or a condition-controlled while loop.</a:t>
-            </a:r>
-            <a:endParaRPr lang="en-US" sz="2200" dirty="0"/>
-          </a:p>
-        </p:txBody>
-      </p:sp>
-      <p:sp>
-        <p:nvSpPr>
-          <p:cNvPr id="10" name="Text 8"/>
-          <p:cNvSpPr txBox="1"/>
-          <p:nvPr/>
-        </p:nvSpPr>
-        <p:spPr>
-          <a:xfrm>
-            <a:off x="502920" y="4526280"/>
-            <a:ext cx="11155680" cy="457200"/>
+              <a:t>0</a:t>
+            </a:r>
+            <a:endParaRPr lang="en-US" sz="1700" dirty="0"/>
+          </a:p>
+        </p:txBody>
+      </p:sp>
+      <p:sp>
+        <p:nvSpPr>
+          <p:cNvPr id="15" name="Shape 13"/>
+          <p:cNvSpPr/>
+          <p:nvPr/>
+        </p:nvSpPr>
+        <p:spPr>
+          <a:xfrm>
+            <a:off x="5806440" y="3017520"/>
+            <a:ext cx="5852160" cy="731520"/>
+          </a:xfrm>
+          <a:prstGeom prst="roundRect">
+            <a:avLst>
+              <a:gd name="adj" fmla="val 15000"/>
+            </a:avLst>
+          </a:prstGeom>
+          <a:solidFill>
+            <a:srgbClr val="FFFFFF"/>
+          </a:solidFill>
+          <a:ln w="15875">
+            <a:solidFill>
+              <a:srgbClr val="D9DEE7"/>
+            </a:solidFill>
+            <a:prstDash val="solid"/>
+          </a:ln>
+        </p:spPr>
+      </p:sp>
+      <p:sp>
+        <p:nvSpPr>
+          <p:cNvPr id="16" name="Shape 14"/>
+          <p:cNvSpPr/>
+          <p:nvPr/>
+        </p:nvSpPr>
+        <p:spPr>
+          <a:xfrm>
+            <a:off x="6080760" y="3163824"/>
+            <a:ext cx="438912" cy="438912"/>
+          </a:xfrm>
+          <a:prstGeom prst="roundRect">
+            <a:avLst>
+              <a:gd name="adj" fmla="val 20833"/>
+            </a:avLst>
+          </a:prstGeom>
+          <a:solidFill>
+            <a:srgbClr val="EEF2FB"/>
+          </a:solidFill>
+          <a:ln/>
+        </p:spPr>
+      </p:sp>
+      <p:sp>
+        <p:nvSpPr>
+          <p:cNvPr id="17" name="Text 15"/>
+          <p:cNvSpPr txBox="1"/>
+          <p:nvPr/>
+        </p:nvSpPr>
+        <p:spPr>
+          <a:xfrm>
+            <a:off x="6080760" y="3163824"/>
+            <a:ext cx="438912" cy="438912"/>
+          </a:xfrm>
+          <a:prstGeom prst="rect">
+            <a:avLst/>
+          </a:prstGeom>
+          <a:noFill/>
+          <a:ln/>
+        </p:spPr>
+        <p:txBody>
+          <a:bodyPr wrap="square" lIns="0" tIns="0" rIns="0" bIns="0" rtlCol="0" anchor="ctr"/>
+          <a:lstStyle/>
+          <a:p>
+            <a:pPr algn="ctr" indent="0" marL="0">
+              <a:buNone/>
+            </a:pPr>
+            <a:r>
+              <a:rPr lang="en-US" sz="1300" b="1" dirty="0">
+                <a:solidFill>
+                  <a:srgbClr val="2D63FF"/>
+                </a:solidFill>
+                <a:latin typeface="IBM Plex Mono" pitchFamily="34" charset="0"/>
+                <a:ea typeface="IBM Plex Mono" pitchFamily="34" charset="-122"/>
+                <a:cs typeface="IBM Plex Mono" pitchFamily="34" charset="-120"/>
+              </a:rPr>
+              <a:t>B</a:t>
+            </a:r>
+            <a:endParaRPr lang="en-US" sz="1300" dirty="0"/>
+          </a:p>
+        </p:txBody>
+      </p:sp>
+      <p:sp>
+        <p:nvSpPr>
+          <p:cNvPr id="18" name="Text 16"/>
+          <p:cNvSpPr txBox="1"/>
+          <p:nvPr/>
+        </p:nvSpPr>
+        <p:spPr>
+          <a:xfrm>
+            <a:off x="6720840" y="3017520"/>
+            <a:ext cx="4754880" cy="731520"/>
           </a:xfrm>
           <a:prstGeom prst="rect">
             <a:avLst/>
@@ -3132,20 +3587,153 @@
           <a:lstStyle/>
           <a:p>
             <a:pPr indent="0" marL="0">
-              <a:buNone/>
-            </a:pPr>
-            <a:r>
-              <a:rPr lang="en-US" sz="1600" dirty="0">
-                <a:solidFill>
-                  <a:srgbClr val="667085"/>
+              <a:lnSpc>
+                <a:spcPct val="115000"/>
+              </a:lnSpc>
+              <a:buNone/>
+            </a:pPr>
+            <a:r>
+              <a:rPr lang="en-US" sz="1700" dirty="0">
+                <a:solidFill>
+                  <a:srgbClr val="101828"/>
                 </a:solidFill>
                 <a:latin typeface="IBM Plex Sans" pitchFamily="34" charset="0"/>
                 <a:ea typeface="IBM Plex Sans" pitchFamily="34" charset="-122"/>
                 <a:cs typeface="IBM Plex Sans" pitchFamily="34" charset="-120"/>
               </a:rPr>
-              <a:t>Predict on paper first, then look down and test it.</a:t>
-            </a:r>
-            <a:endParaRPr lang="en-US" sz="1600" dirty="0"/>
+              <a:t>2</a:t>
+            </a:r>
+            <a:endParaRPr lang="en-US" sz="1700" dirty="0"/>
+          </a:p>
+        </p:txBody>
+      </p:sp>
+      <p:sp>
+        <p:nvSpPr>
+          <p:cNvPr id="19" name="Shape 17"/>
+          <p:cNvSpPr/>
+          <p:nvPr/>
+        </p:nvSpPr>
+        <p:spPr>
+          <a:xfrm>
+            <a:off x="5806440" y="3886200"/>
+            <a:ext cx="5852160" cy="731520"/>
+          </a:xfrm>
+          <a:prstGeom prst="roundRect">
+            <a:avLst>
+              <a:gd name="adj" fmla="val 15000"/>
+            </a:avLst>
+          </a:prstGeom>
+          <a:solidFill>
+            <a:srgbClr val="FFFFFF"/>
+          </a:solidFill>
+          <a:ln w="15875">
+            <a:solidFill>
+              <a:srgbClr val="D9DEE7"/>
+            </a:solidFill>
+            <a:prstDash val="solid"/>
+          </a:ln>
+        </p:spPr>
+      </p:sp>
+      <p:sp>
+        <p:nvSpPr>
+          <p:cNvPr id="20" name="Shape 18"/>
+          <p:cNvSpPr/>
+          <p:nvPr/>
+        </p:nvSpPr>
+        <p:spPr>
+          <a:xfrm>
+            <a:off x="6080760" y="4032504"/>
+            <a:ext cx="438912" cy="438912"/>
+          </a:xfrm>
+          <a:prstGeom prst="roundRect">
+            <a:avLst>
+              <a:gd name="adj" fmla="val 20833"/>
+            </a:avLst>
+          </a:prstGeom>
+          <a:solidFill>
+            <a:srgbClr val="EEF2FB"/>
+          </a:solidFill>
+          <a:ln/>
+        </p:spPr>
+      </p:sp>
+      <p:sp>
+        <p:nvSpPr>
+          <p:cNvPr id="21" name="Text 19"/>
+          <p:cNvSpPr txBox="1"/>
+          <p:nvPr/>
+        </p:nvSpPr>
+        <p:spPr>
+          <a:xfrm>
+            <a:off x="6080760" y="4032504"/>
+            <a:ext cx="438912" cy="438912"/>
+          </a:xfrm>
+          <a:prstGeom prst="rect">
+            <a:avLst/>
+          </a:prstGeom>
+          <a:noFill/>
+          <a:ln/>
+        </p:spPr>
+        <p:txBody>
+          <a:bodyPr wrap="square" lIns="0" tIns="0" rIns="0" bIns="0" rtlCol="0" anchor="ctr"/>
+          <a:lstStyle/>
+          <a:p>
+            <a:pPr algn="ctr" indent="0" marL="0">
+              <a:buNone/>
+            </a:pPr>
+            <a:r>
+              <a:rPr lang="en-US" sz="1300" b="1" dirty="0">
+                <a:solidFill>
+                  <a:srgbClr val="2D63FF"/>
+                </a:solidFill>
+                <a:latin typeface="IBM Plex Mono" pitchFamily="34" charset="0"/>
+                <a:ea typeface="IBM Plex Mono" pitchFamily="34" charset="-122"/>
+                <a:cs typeface="IBM Plex Mono" pitchFamily="34" charset="-120"/>
+              </a:rPr>
+              <a:t>C</a:t>
+            </a:r>
+            <a:endParaRPr lang="en-US" sz="1300" dirty="0"/>
+          </a:p>
+        </p:txBody>
+      </p:sp>
+      <p:sp>
+        <p:nvSpPr>
+          <p:cNvPr id="22" name="Text 20"/>
+          <p:cNvSpPr txBox="1"/>
+          <p:nvPr/>
+        </p:nvSpPr>
+        <p:spPr>
+          <a:xfrm>
+            <a:off x="6720840" y="3886200"/>
+            <a:ext cx="4754880" cy="731520"/>
+          </a:xfrm>
+          <a:prstGeom prst="rect">
+            <a:avLst/>
+          </a:prstGeom>
+          <a:noFill/>
+          <a:ln/>
+        </p:spPr>
+        <p:txBody>
+          <a:bodyPr wrap="square" lIns="0" tIns="0" rIns="0" bIns="0" rtlCol="0" anchor="ctr"/>
+          <a:lstStyle/>
+          <a:p>
+            <a:pPr indent="0" marL="0">
+              <a:lnSpc>
+                <a:spcPct val="115000"/>
+              </a:lnSpc>
+              <a:buNone/>
+            </a:pPr>
+            <a:r>
+              <a:rPr lang="en-US" sz="1700" dirty="0">
+                <a:solidFill>
+                  <a:srgbClr val="101828"/>
+                </a:solidFill>
+                <a:latin typeface="IBM Plex Sans" pitchFamily="34" charset="0"/>
+                <a:ea typeface="IBM Plex Sans" pitchFamily="34" charset="-122"/>
+                <a:cs typeface="IBM Plex Sans" pitchFamily="34" charset="-120"/>
+              </a:rPr>
+              <a:t>3</a:t>
+            </a:r>
+            <a:endParaRPr lang="en-US" sz="1700" dirty="0"/>
           </a:p>
         </p:txBody>
       </p:sp>
@@ -3281,14 +3869,75 @@
       </p:sp>
       <p:sp>
         <p:nvSpPr>
-          <p:cNvPr id="5" name="Text 3"/>
-          <p:cNvSpPr txBox="1"/>
-          <p:nvPr/>
-        </p:nvSpPr>
-        <p:spPr>
-          <a:xfrm>
-            <a:off x="502920" y="411480"/>
-            <a:ext cx="11155680" cy="777240"/>
+          <p:cNvPr id="5" name="Shape 3"/>
+          <p:cNvSpPr/>
+          <p:nvPr/>
+        </p:nvSpPr>
+        <p:spPr>
+          <a:xfrm>
+            <a:off x="502920" y="438912"/>
+            <a:ext cx="3108960" cy="502920"/>
+          </a:xfrm>
+          <a:prstGeom prst="roundRect">
+            <a:avLst>
+              <a:gd name="adj" fmla="val 18182"/>
+            </a:avLst>
+          </a:prstGeom>
+          <a:solidFill>
+            <a:srgbClr val="F4B942"/>
+          </a:solidFill>
+          <a:ln/>
+        </p:spPr>
+      </p:sp>
+      <p:sp>
+        <p:nvSpPr>
+          <p:cNvPr id="6" name="Text 4"/>
+          <p:cNvSpPr txBox="1"/>
+          <p:nvPr/>
+        </p:nvSpPr>
+        <p:spPr>
+          <a:xfrm>
+            <a:off x="502920" y="438912"/>
+            <a:ext cx="3108960" cy="502920"/>
+          </a:xfrm>
+          <a:prstGeom prst="rect">
+            <a:avLst/>
+          </a:prstGeom>
+          <a:noFill/>
+          <a:ln/>
+        </p:spPr>
+        <p:txBody>
+          <a:bodyPr wrap="square" lIns="0" tIns="0" rIns="0" bIns="0" rtlCol="0" anchor="ctr"/>
+          <a:lstStyle/>
+          <a:p>
+            <a:pPr algn="ctr" indent="0" marL="0">
+              <a:buNone/>
+            </a:pPr>
+            <a:r>
+              <a:rPr lang="en-US" sz="1300" b="1" dirty="0">
+                <a:solidFill>
+                  <a:srgbClr val="101828"/>
+                </a:solidFill>
+                <a:latin typeface="IBM Plex Mono" pitchFamily="34" charset="0"/>
+                <a:ea typeface="IBM Plex Mono" pitchFamily="34" charset="-122"/>
+                <a:cs typeface="IBM Plex Mono" pitchFamily="34" charset="-120"/>
+              </a:rPr>
+              <a:t>★  FINAL CHALLENGE</a:t>
+            </a:r>
+            <a:endParaRPr lang="en-US" sz="1300" dirty="0"/>
+          </a:p>
+        </p:txBody>
+      </p:sp>
+      <p:sp>
+        <p:nvSpPr>
+          <p:cNvPr id="7" name="Text 5"/>
+          <p:cNvSpPr txBox="1"/>
+          <p:nvPr/>
+        </p:nvSpPr>
+        <p:spPr>
+          <a:xfrm>
+            <a:off x="502920" y="1097280"/>
+            <a:ext cx="11155680" cy="731520"/>
           </a:xfrm>
           <a:prstGeom prst="rect">
             <a:avLst/>
@@ -3304,7 +3953,7 @@
               <a:buNone/>
             </a:pPr>
             <a:r>
-              <a:rPr lang="en-US" sz="3200" b="1" dirty="0">
+              <a:rPr lang="en-US" sz="3400" b="1" dirty="0">
                 <a:solidFill>
                   <a:srgbClr val="101828"/>
                 </a:solidFill>
@@ -3312,65 +3961,26 @@
                 <a:ea typeface="IBM Plex Sans" pitchFamily="34" charset="-122"/>
                 <a:cs typeface="IBM Plex Sans" pitchFamily="34" charset="-120"/>
               </a:rPr>
-              <a:t>Worth knowing</a:t>
-            </a:r>
-            <a:endParaRPr lang="en-US" sz="3200" dirty="0"/>
-          </a:p>
-        </p:txBody>
-      </p:sp>
-      <p:sp>
-        <p:nvSpPr>
-          <p:cNvPr id="6" name="Text 4"/>
-          <p:cNvSpPr txBox="1"/>
-          <p:nvPr/>
-        </p:nvSpPr>
-        <p:spPr>
-          <a:xfrm>
-            <a:off x="502920" y="1170432"/>
-            <a:ext cx="11155680" cy="411480"/>
-          </a:xfrm>
-          <a:prstGeom prst="rect">
-            <a:avLst/>
-          </a:prstGeom>
-          <a:noFill/>
-          <a:ln/>
-        </p:spPr>
-        <p:txBody>
-          <a:bodyPr wrap="square" lIns="0" tIns="0" rIns="0" bIns="0" rtlCol="0" anchor="ctr"/>
-          <a:lstStyle/>
-          <a:p>
-            <a:pPr indent="0" marL="0">
-              <a:buNone/>
-            </a:pPr>
-            <a:r>
-              <a:rPr lang="en-US" sz="1500" dirty="0">
-                <a:solidFill>
-                  <a:srgbClr val="667085"/>
-                </a:solidFill>
-                <a:latin typeface="IBM Plex Sans" pitchFamily="34" charset="0"/>
-                <a:ea typeface="IBM Plex Sans" pitchFamily="34" charset="-122"/>
-                <a:cs typeface="IBM Plex Sans" pitchFamily="34" charset="-120"/>
-              </a:rPr>
-              <a:t>The information markers dotted around the room</a:t>
-            </a:r>
-            <a:endParaRPr lang="en-US" sz="1500" dirty="0"/>
-          </a:p>
-        </p:txBody>
-      </p:sp>
-      <p:sp>
-        <p:nvSpPr>
-          <p:cNvPr id="7" name="Shape 5"/>
+              <a:t>For or while?</a:t>
+            </a:r>
+            <a:endParaRPr lang="en-US" sz="3400" dirty="0"/>
+          </a:p>
+        </p:txBody>
+      </p:sp>
+      <p:sp>
+        <p:nvSpPr>
+          <p:cNvPr id="8" name="Shape 6"/>
           <p:cNvSpPr/>
           <p:nvPr/>
         </p:nvSpPr>
         <p:spPr>
           <a:xfrm>
-            <a:off x="502920" y="1828800"/>
-            <a:ext cx="5394960" cy="1737360"/>
+            <a:off x="502920" y="2011680"/>
+            <a:ext cx="11155680" cy="2194560"/>
           </a:xfrm>
           <a:prstGeom prst="roundRect">
             <a:avLst>
-              <a:gd name="adj" fmla="val 6316"/>
+              <a:gd name="adj" fmla="val 5000"/>
             </a:avLst>
           </a:prstGeom>
           <a:solidFill>
@@ -3386,14 +3996,14 @@
       </p:sp>
       <p:sp>
         <p:nvSpPr>
-          <p:cNvPr id="8" name="Text 6"/>
-          <p:cNvSpPr txBox="1"/>
-          <p:nvPr/>
-        </p:nvSpPr>
-        <p:spPr>
-          <a:xfrm>
-            <a:off x="822960" y="2011680"/>
-            <a:ext cx="4754880" cy="365760"/>
+          <p:cNvPr id="9" name="Text 7"/>
+          <p:cNvSpPr txBox="1"/>
+          <p:nvPr/>
+        </p:nvSpPr>
+        <p:spPr>
+          <a:xfrm>
+            <a:off x="1005840" y="2331720"/>
+            <a:ext cx="10149840" cy="1554480"/>
           </a:xfrm>
           <a:prstGeom prst="rect">
             <a:avLst/>
@@ -3406,52 +4016,52 @@
           <a:lstStyle/>
           <a:p>
             <a:pPr indent="0" marL="0">
-              <a:buNone/>
-            </a:pPr>
-            <a:r>
-              <a:rPr lang="en-US" sz="1600" b="1" dirty="0">
-                <a:solidFill>
-                  <a:srgbClr val="2D63FF"/>
+              <a:lnSpc>
+                <a:spcPct val="130000"/>
+              </a:lnSpc>
+              <a:buNone/>
+            </a:pPr>
+            <a:r>
+              <a:rPr lang="en-US" sz="2200" dirty="0">
+                <a:solidFill>
+                  <a:srgbClr val="101828"/>
                 </a:solidFill>
                 <a:latin typeface="IBM Plex Sans" pitchFamily="34" charset="0"/>
                 <a:ea typeface="IBM Plex Sans" pitchFamily="34" charset="-122"/>
                 <a:cs typeface="IBM Plex Sans" pitchFamily="34" charset="-120"/>
               </a:rPr>
-              <a:t>Stuck forever</a:t>
-            </a:r>
-            <a:endParaRPr lang="en-US" sz="1600" dirty="0"/>
-          </a:p>
-        </p:txBody>
-      </p:sp>
-      <p:sp>
-        <p:nvSpPr>
-          <p:cNvPr id="9" name="Text 7"/>
-          <p:cNvSpPr txBox="1"/>
-          <p:nvPr/>
-        </p:nvSpPr>
-        <p:spPr>
-          <a:xfrm>
-            <a:off x="822960" y="2395728"/>
-            <a:ext cx="4754880" cy="1005840"/>
-          </a:xfrm>
-          <a:prstGeom prst="rect">
-            <a:avLst/>
-          </a:prstGeom>
-          <a:noFill/>
-          <a:ln/>
-        </p:spPr>
-        <p:txBody>
-          <a:bodyPr wrap="square" lIns="0" tIns="0" rIns="0" bIns="0" rtlCol="0" anchor="t"/>
+              <a:t>Eight jobs are waiting on the floor below you. Tap the star and decide whether each one needs a count-controlled for loop or a condition-controlled while loop.</a:t>
+            </a:r>
+            <a:endParaRPr lang="en-US" sz="2200" dirty="0"/>
+          </a:p>
+        </p:txBody>
+      </p:sp>
+      <p:sp>
+        <p:nvSpPr>
+          <p:cNvPr id="10" name="Text 8"/>
+          <p:cNvSpPr txBox="1"/>
+          <p:nvPr/>
+        </p:nvSpPr>
+        <p:spPr>
+          <a:xfrm>
+            <a:off x="502920" y="4526280"/>
+            <a:ext cx="11155680" cy="457200"/>
+          </a:xfrm>
+          <a:prstGeom prst="rect">
+            <a:avLst/>
+          </a:prstGeom>
+          <a:noFill/>
+          <a:ln/>
+        </p:spPr>
+        <p:txBody>
+          <a:bodyPr wrap="square" lIns="0" tIns="0" rIns="0" bIns="0" rtlCol="0" anchor="ctr"/>
           <a:lstStyle/>
           <a:p>
             <a:pPr indent="0" marL="0">
-              <a:lnSpc>
-                <a:spcPct val="120000"/>
-              </a:lnSpc>
-              <a:buNone/>
-            </a:pPr>
-            <a:r>
-              <a:rPr lang="en-US" sz="1300" dirty="0">
+              <a:buNone/>
+            </a:pPr>
+            <a:r>
+              <a:rPr lang="en-US" sz="1600" dirty="0">
                 <a:solidFill>
                   <a:srgbClr val="667085"/>
                 </a:solidFill>
@@ -3459,333 +4069,9 @@
                 <a:ea typeface="IBM Plex Sans" pitchFamily="34" charset="-122"/>
                 <a:cs typeface="IBM Plex Sans" pitchFamily="34" charset="-120"/>
               </a:rPr>
-              <a:t>If a program stops responding, an infinite loop is often why: the condition it waits for can never become False.</a:t>
-            </a:r>
-            <a:endParaRPr lang="en-US" sz="1300" dirty="0"/>
-          </a:p>
-        </p:txBody>
-      </p:sp>
-      <p:sp>
-        <p:nvSpPr>
-          <p:cNvPr id="10" name="Shape 8"/>
-          <p:cNvSpPr/>
-          <p:nvPr/>
-        </p:nvSpPr>
-        <p:spPr>
-          <a:xfrm>
-            <a:off x="6217920" y="1828800"/>
-            <a:ext cx="5394960" cy="1737360"/>
-          </a:xfrm>
-          <a:prstGeom prst="roundRect">
-            <a:avLst>
-              <a:gd name="adj" fmla="val 6316"/>
-            </a:avLst>
-          </a:prstGeom>
-          <a:solidFill>
-            <a:srgbClr val="FFFFFF"/>
-          </a:solidFill>
-          <a:ln w="15875">
-            <a:solidFill>
-              <a:srgbClr val="08A6A6"/>
-            </a:solidFill>
-            <a:prstDash val="solid"/>
-          </a:ln>
-        </p:spPr>
-      </p:sp>
-      <p:sp>
-        <p:nvSpPr>
-          <p:cNvPr id="11" name="Text 9"/>
-          <p:cNvSpPr txBox="1"/>
-          <p:nvPr/>
-        </p:nvSpPr>
-        <p:spPr>
-          <a:xfrm>
-            <a:off x="6537960" y="2011680"/>
-            <a:ext cx="4754880" cy="365760"/>
-          </a:xfrm>
-          <a:prstGeom prst="rect">
-            <a:avLst/>
-          </a:prstGeom>
-          <a:noFill/>
-          <a:ln/>
-        </p:spPr>
-        <p:txBody>
-          <a:bodyPr wrap="square" lIns="0" tIns="0" rIns="0" bIns="0" rtlCol="0" anchor="ctr"/>
-          <a:lstStyle/>
-          <a:p>
-            <a:pPr indent="0" marL="0">
-              <a:buNone/>
-            </a:pPr>
-            <a:r>
-              <a:rPr lang="en-US" sz="1600" b="1" dirty="0">
-                <a:solidFill>
-                  <a:srgbClr val="08A6A6"/>
-                </a:solidFill>
-                <a:latin typeface="IBM Plex Sans" pitchFamily="34" charset="0"/>
-                <a:ea typeface="IBM Plex Sans" pitchFamily="34" charset="-122"/>
-                <a:cs typeface="IBM Plex Sans" pitchFamily="34" charset="-120"/>
-              </a:rPr>
-              <a:t>Ask again politely</a:t>
+              <a:t>Predict on paper first, then look down and test it.</a:t>
             </a:r>
             <a:endParaRPr lang="en-US" sz="1600" dirty="0"/>
-          </a:p>
-        </p:txBody>
-      </p:sp>
-      <p:sp>
-        <p:nvSpPr>
-          <p:cNvPr id="12" name="Text 10"/>
-          <p:cNvSpPr txBox="1"/>
-          <p:nvPr/>
-        </p:nvSpPr>
-        <p:spPr>
-          <a:xfrm>
-            <a:off x="6537960" y="2395728"/>
-            <a:ext cx="4754880" cy="1005840"/>
-          </a:xfrm>
-          <a:prstGeom prst="rect">
-            <a:avLst/>
-          </a:prstGeom>
-          <a:noFill/>
-          <a:ln/>
-        </p:spPr>
-        <p:txBody>
-          <a:bodyPr wrap="square" lIns="0" tIns="0" rIns="0" bIns="0" rtlCol="0" anchor="t"/>
-          <a:lstStyle/>
-          <a:p>
-            <a:pPr indent="0" marL="0">
-              <a:lnSpc>
-                <a:spcPct val="120000"/>
-              </a:lnSpc>
-              <a:buNone/>
-            </a:pPr>
-            <a:r>
-              <a:rPr lang="en-US" sz="1300" dirty="0">
-                <a:solidFill>
-                  <a:srgbClr val="667085"/>
-                </a:solidFill>
-                <a:latin typeface="IBM Plex Sans" pitchFamily="34" charset="0"/>
-                <a:ea typeface="IBM Plex Sans" pitchFamily="34" charset="-122"/>
-                <a:cs typeface="IBM Plex Sans" pitchFamily="34" charset="-120"/>
-              </a:rPr>
-              <a:t>A good validation loop says what was wrong with the last answer, not just 'try again'.</a:t>
-            </a:r>
-            <a:endParaRPr lang="en-US" sz="1300" dirty="0"/>
-          </a:p>
-        </p:txBody>
-      </p:sp>
-      <p:sp>
-        <p:nvSpPr>
-          <p:cNvPr id="13" name="Shape 11"/>
-          <p:cNvSpPr/>
-          <p:nvPr/>
-        </p:nvSpPr>
-        <p:spPr>
-          <a:xfrm>
-            <a:off x="502920" y="3794760"/>
-            <a:ext cx="5394960" cy="1737360"/>
-          </a:xfrm>
-          <a:prstGeom prst="roundRect">
-            <a:avLst>
-              <a:gd name="adj" fmla="val 6316"/>
-            </a:avLst>
-          </a:prstGeom>
-          <a:solidFill>
-            <a:srgbClr val="FFFFFF"/>
-          </a:solidFill>
-          <a:ln w="15875">
-            <a:solidFill>
-              <a:srgbClr val="2D63FF"/>
-            </a:solidFill>
-            <a:prstDash val="solid"/>
-          </a:ln>
-        </p:spPr>
-      </p:sp>
-      <p:sp>
-        <p:nvSpPr>
-          <p:cNvPr id="14" name="Text 12"/>
-          <p:cNvSpPr txBox="1"/>
-          <p:nvPr/>
-        </p:nvSpPr>
-        <p:spPr>
-          <a:xfrm>
-            <a:off x="822960" y="3977640"/>
-            <a:ext cx="4754880" cy="365760"/>
-          </a:xfrm>
-          <a:prstGeom prst="rect">
-            <a:avLst/>
-          </a:prstGeom>
-          <a:noFill/>
-          <a:ln/>
-        </p:spPr>
-        <p:txBody>
-          <a:bodyPr wrap="square" lIns="0" tIns="0" rIns="0" bIns="0" rtlCol="0" anchor="ctr"/>
-          <a:lstStyle/>
-          <a:p>
-            <a:pPr indent="0" marL="0">
-              <a:buNone/>
-            </a:pPr>
-            <a:r>
-              <a:rPr lang="en-US" sz="1600" b="1" dirty="0">
-                <a:solidFill>
-                  <a:srgbClr val="2D63FF"/>
-                </a:solidFill>
-                <a:latin typeface="IBM Plex Sans" pitchFamily="34" charset="0"/>
-                <a:ea typeface="IBM Plex Sans" pitchFamily="34" charset="-122"/>
-                <a:cs typeface="IBM Plex Sans" pitchFamily="34" charset="-120"/>
-              </a:rPr>
-              <a:t>Choosing a sentinel</a:t>
-            </a:r>
-            <a:endParaRPr lang="en-US" sz="1600" dirty="0"/>
-          </a:p>
-        </p:txBody>
-      </p:sp>
-      <p:sp>
-        <p:nvSpPr>
-          <p:cNvPr id="15" name="Text 13"/>
-          <p:cNvSpPr txBox="1"/>
-          <p:nvPr/>
-        </p:nvSpPr>
-        <p:spPr>
-          <a:xfrm>
-            <a:off x="822960" y="4361688"/>
-            <a:ext cx="4754880" cy="1005840"/>
-          </a:xfrm>
-          <a:prstGeom prst="rect">
-            <a:avLst/>
-          </a:prstGeom>
-          <a:noFill/>
-          <a:ln/>
-        </p:spPr>
-        <p:txBody>
-          <a:bodyPr wrap="square" lIns="0" tIns="0" rIns="0" bIns="0" rtlCol="0" anchor="t"/>
-          <a:lstStyle/>
-          <a:p>
-            <a:pPr indent="0" marL="0">
-              <a:lnSpc>
-                <a:spcPct val="120000"/>
-              </a:lnSpc>
-              <a:buNone/>
-            </a:pPr>
-            <a:r>
-              <a:rPr lang="en-US" sz="1300" dirty="0">
-                <a:solidFill>
-                  <a:srgbClr val="667085"/>
-                </a:solidFill>
-                <a:latin typeface="IBM Plex Sans" pitchFamily="34" charset="0"/>
-                <a:ea typeface="IBM Plex Sans" pitchFamily="34" charset="-122"/>
-                <a:cs typeface="IBM Plex Sans" pitchFamily="34" charset="-120"/>
-              </a:rPr>
-              <a:t>-1 works when the real values can never be negative. For a temperature it would be a terrible choice.</a:t>
-            </a:r>
-            <a:endParaRPr lang="en-US" sz="1300" dirty="0"/>
-          </a:p>
-        </p:txBody>
-      </p:sp>
-      <p:sp>
-        <p:nvSpPr>
-          <p:cNvPr id="16" name="Shape 14"/>
-          <p:cNvSpPr/>
-          <p:nvPr/>
-        </p:nvSpPr>
-        <p:spPr>
-          <a:xfrm>
-            <a:off x="6217920" y="3794760"/>
-            <a:ext cx="5394960" cy="1737360"/>
-          </a:xfrm>
-          <a:prstGeom prst="roundRect">
-            <a:avLst>
-              <a:gd name="adj" fmla="val 6316"/>
-            </a:avLst>
-          </a:prstGeom>
-          <a:solidFill>
-            <a:srgbClr val="FFFFFF"/>
-          </a:solidFill>
-          <a:ln w="15875">
-            <a:solidFill>
-              <a:srgbClr val="08A6A6"/>
-            </a:solidFill>
-            <a:prstDash val="solid"/>
-          </a:ln>
-        </p:spPr>
-      </p:sp>
-      <p:sp>
-        <p:nvSpPr>
-          <p:cNvPr id="17" name="Text 15"/>
-          <p:cNvSpPr txBox="1"/>
-          <p:nvPr/>
-        </p:nvSpPr>
-        <p:spPr>
-          <a:xfrm>
-            <a:off x="6537960" y="3977640"/>
-            <a:ext cx="4754880" cy="365760"/>
-          </a:xfrm>
-          <a:prstGeom prst="rect">
-            <a:avLst/>
-          </a:prstGeom>
-          <a:noFill/>
-          <a:ln/>
-        </p:spPr>
-        <p:txBody>
-          <a:bodyPr wrap="square" lIns="0" tIns="0" rIns="0" bIns="0" rtlCol="0" anchor="ctr"/>
-          <a:lstStyle/>
-          <a:p>
-            <a:pPr indent="0" marL="0">
-              <a:buNone/>
-            </a:pPr>
-            <a:r>
-              <a:rPr lang="en-US" sz="1600" b="1" dirty="0">
-                <a:solidFill>
-                  <a:srgbClr val="08A6A6"/>
-                </a:solidFill>
-                <a:latin typeface="IBM Plex Sans" pitchFamily="34" charset="0"/>
-                <a:ea typeface="IBM Plex Sans" pitchFamily="34" charset="-122"/>
-                <a:cs typeface="IBM Plex Sans" pitchFamily="34" charset="-120"/>
-              </a:rPr>
-              <a:t>Count or total</a:t>
-            </a:r>
-            <a:endParaRPr lang="en-US" sz="1600" dirty="0"/>
-          </a:p>
-        </p:txBody>
-      </p:sp>
-      <p:sp>
-        <p:nvSpPr>
-          <p:cNvPr id="18" name="Text 16"/>
-          <p:cNvSpPr txBox="1"/>
-          <p:nvPr/>
-        </p:nvSpPr>
-        <p:spPr>
-          <a:xfrm>
-            <a:off x="6537960" y="4361688"/>
-            <a:ext cx="4754880" cy="1005840"/>
-          </a:xfrm>
-          <a:prstGeom prst="rect">
-            <a:avLst/>
-          </a:prstGeom>
-          <a:noFill/>
-          <a:ln/>
-        </p:spPr>
-        <p:txBody>
-          <a:bodyPr wrap="square" lIns="0" tIns="0" rIns="0" bIns="0" rtlCol="0" anchor="t"/>
-          <a:lstStyle/>
-          <a:p>
-            <a:pPr indent="0" marL="0">
-              <a:lnSpc>
-                <a:spcPct val="120000"/>
-              </a:lnSpc>
-              <a:buNone/>
-            </a:pPr>
-            <a:r>
-              <a:rPr lang="en-US" sz="1300" dirty="0">
-                <a:solidFill>
-                  <a:srgbClr val="667085"/>
-                </a:solidFill>
-                <a:latin typeface="IBM Plex Sans" pitchFamily="34" charset="0"/>
-                <a:ea typeface="IBM Plex Sans" pitchFamily="34" charset="-122"/>
-                <a:cs typeface="IBM Plex Sans" pitchFamily="34" charset="-120"/>
-              </a:rPr>
-              <a:t>A counter always adds 1. A running total adds whatever came in. Plenty of programs need both at once.</a:t>
-            </a:r>
-            <a:endParaRPr lang="en-US" sz="1300" dirty="0"/>
           </a:p>
         </p:txBody>
       </p:sp>
@@ -3952,7 +4238,7 @@
                 <a:ea typeface="IBM Plex Sans" pitchFamily="34" charset="-122"/>
                 <a:cs typeface="IBM Plex Sans" pitchFamily="34" charset="-120"/>
               </a:rPr>
-              <a:t>Exam practice</a:t>
+              <a:t>Worth knowing</a:t>
             </a:r>
             <a:endParaRPr lang="en-US" sz="3200" dirty="0"/>
           </a:p>
@@ -3991,7 +4277,7 @@
                 <a:ea typeface="IBM Plex Sans" pitchFamily="34" charset="-122"/>
                 <a:cs typeface="IBM Plex Sans" pitchFamily="34" charset="-120"/>
               </a:rPr>
-              <a:t>Devices away. Answer from memory on the worksheet.</a:t>
+              <a:t>The information markers dotted around the room</a:t>
             </a:r>
             <a:endParaRPr lang="en-US" sz="1500" dirty="0"/>
           </a:p>
@@ -4006,11 +4292,11 @@
         <p:spPr>
           <a:xfrm>
             <a:off x="502920" y="1828800"/>
-            <a:ext cx="11155680" cy="1097280"/>
+            <a:ext cx="5394960" cy="1737360"/>
           </a:xfrm>
           <a:prstGeom prst="roundRect">
             <a:avLst>
-              <a:gd name="adj" fmla="val 10000"/>
+              <a:gd name="adj" fmla="val 6316"/>
             </a:avLst>
           </a:prstGeom>
           <a:solidFill>
@@ -4018,7 +4304,7 @@
           </a:solidFill>
           <a:ln w="15875">
             <a:solidFill>
-              <a:srgbClr val="D9DEE7"/>
+              <a:srgbClr val="2D63FF"/>
             </a:solidFill>
             <a:prstDash val="solid"/>
           </a:ln>
@@ -4032,8 +4318,8 @@
         </p:nvSpPr>
         <p:spPr>
           <a:xfrm>
-            <a:off x="914400" y="1938528"/>
-            <a:ext cx="9418320" cy="877824"/>
+            <a:off x="822960" y="2011680"/>
+            <a:ext cx="4754880" cy="365760"/>
           </a:xfrm>
           <a:prstGeom prst="rect">
             <a:avLst/>
@@ -4046,101 +4332,79 @@
           <a:lstStyle/>
           <a:p>
             <a:pPr indent="0" marL="0">
-              <a:lnSpc>
-                <a:spcPct val="118000"/>
-              </a:lnSpc>
-              <a:buNone/>
-            </a:pPr>
-            <a:r>
-              <a:rPr lang="en-US" sz="1700" dirty="0">
-                <a:solidFill>
-                  <a:srgbClr val="101828"/>
+              <a:buNone/>
+            </a:pPr>
+            <a:r>
+              <a:rPr lang="en-US" sz="1600" b="1" dirty="0">
+                <a:solidFill>
+                  <a:srgbClr val="2D63FF"/>
                 </a:solidFill>
                 <a:latin typeface="IBM Plex Sans" pitchFamily="34" charset="0"/>
                 <a:ea typeface="IBM Plex Sans" pitchFamily="34" charset="-122"/>
                 <a:cs typeface="IBM Plex Sans" pitchFamily="34" charset="-120"/>
               </a:rPr>
-              <a:t>A validation loop reads a whole number, then repeats for as long as it is outside 1 to 20. When 99 is typed the program prints out of range over and over. State what has been left out of the loop, and where in the loop it belongs.</a:t>
-            </a:r>
-            <a:endParaRPr lang="en-US" sz="1700" dirty="0"/>
-          </a:p>
-        </p:txBody>
-      </p:sp>
-      <p:sp>
-        <p:nvSpPr>
-          <p:cNvPr id="9" name="Shape 7"/>
+              <a:t>Stuck forever</a:t>
+            </a:r>
+            <a:endParaRPr lang="en-US" sz="1600" dirty="0"/>
+          </a:p>
+        </p:txBody>
+      </p:sp>
+      <p:sp>
+        <p:nvSpPr>
+          <p:cNvPr id="9" name="Text 7"/>
+          <p:cNvSpPr txBox="1"/>
+          <p:nvPr/>
+        </p:nvSpPr>
+        <p:spPr>
+          <a:xfrm>
+            <a:off x="822960" y="2395728"/>
+            <a:ext cx="4754880" cy="1005840"/>
+          </a:xfrm>
+          <a:prstGeom prst="rect">
+            <a:avLst/>
+          </a:prstGeom>
+          <a:noFill/>
+          <a:ln/>
+        </p:spPr>
+        <p:txBody>
+          <a:bodyPr wrap="square" lIns="0" tIns="0" rIns="0" bIns="0" rtlCol="0" anchor="t"/>
+          <a:lstStyle/>
+          <a:p>
+            <a:pPr indent="0" marL="0">
+              <a:lnSpc>
+                <a:spcPct val="120000"/>
+              </a:lnSpc>
+              <a:buNone/>
+            </a:pPr>
+            <a:r>
+              <a:rPr lang="en-US" sz="1300" dirty="0">
+                <a:solidFill>
+                  <a:srgbClr val="667085"/>
+                </a:solidFill>
+                <a:latin typeface="IBM Plex Sans" pitchFamily="34" charset="0"/>
+                <a:ea typeface="IBM Plex Sans" pitchFamily="34" charset="-122"/>
+                <a:cs typeface="IBM Plex Sans" pitchFamily="34" charset="-120"/>
+              </a:rPr>
+              <a:t>If a program stops responding, an infinite loop is often why: the condition it waits for can never become False.</a:t>
+            </a:r>
+            <a:endParaRPr lang="en-US" sz="1300" dirty="0"/>
+          </a:p>
+        </p:txBody>
+      </p:sp>
+      <p:sp>
+        <p:nvSpPr>
+          <p:cNvPr id="10" name="Shape 8"/>
           <p:cNvSpPr/>
           <p:nvPr/>
         </p:nvSpPr>
         <p:spPr>
           <a:xfrm>
-            <a:off x="10515600" y="2130552"/>
-            <a:ext cx="868680" cy="493776"/>
+            <a:off x="6217920" y="1828800"/>
+            <a:ext cx="5394960" cy="1737360"/>
           </a:xfrm>
           <a:prstGeom prst="roundRect">
             <a:avLst>
-              <a:gd name="adj" fmla="val 18519"/>
-            </a:avLst>
-          </a:prstGeom>
-          <a:solidFill>
-            <a:srgbClr val="EEF2FB"/>
-          </a:solidFill>
-          <a:ln/>
-        </p:spPr>
-      </p:sp>
-      <p:sp>
-        <p:nvSpPr>
-          <p:cNvPr id="10" name="Text 8"/>
-          <p:cNvSpPr txBox="1"/>
-          <p:nvPr/>
-        </p:nvSpPr>
-        <p:spPr>
-          <a:xfrm>
-            <a:off x="10515600" y="2130552"/>
-            <a:ext cx="868680" cy="493776"/>
-          </a:xfrm>
-          <a:prstGeom prst="rect">
-            <a:avLst/>
-          </a:prstGeom>
-          <a:noFill/>
-          <a:ln/>
-        </p:spPr>
-        <p:txBody>
-          <a:bodyPr wrap="square" lIns="0" tIns="0" rIns="0" bIns="0" rtlCol="0" anchor="ctr"/>
-          <a:lstStyle/>
-          <a:p>
-            <a:pPr algn="ctr" indent="0" marL="0">
-              <a:buNone/>
-            </a:pPr>
-            <a:r>
-              <a:rPr lang="en-US" sz="1500" b="1" dirty="0">
-                <a:solidFill>
-                  <a:srgbClr val="2D63FF"/>
-                </a:solidFill>
-                <a:latin typeface="IBM Plex Mono" pitchFamily="34" charset="0"/>
-                <a:ea typeface="IBM Plex Mono" pitchFamily="34" charset="-122"/>
-                <a:cs typeface="IBM Plex Mono" pitchFamily="34" charset="-120"/>
-              </a:rPr>
-              <a:t>[2]</a:t>
-            </a:r>
-            <a:endParaRPr lang="en-US" sz="1500" dirty="0"/>
-          </a:p>
-        </p:txBody>
-      </p:sp>
-      <p:sp>
-        <p:nvSpPr>
-          <p:cNvPr id="11" name="Shape 9"/>
-          <p:cNvSpPr/>
-          <p:nvPr/>
-        </p:nvSpPr>
-        <p:spPr>
-          <a:xfrm>
-            <a:off x="502920" y="3127248"/>
-            <a:ext cx="11155680" cy="1097280"/>
-          </a:xfrm>
-          <a:prstGeom prst="roundRect">
-            <a:avLst>
-              <a:gd name="adj" fmla="val 10000"/>
+              <a:gd name="adj" fmla="val 6316"/>
             </a:avLst>
           </a:prstGeom>
           <a:solidFill>
@@ -4148,7 +4412,7 @@
           </a:solidFill>
           <a:ln w="15875">
             <a:solidFill>
-              <a:srgbClr val="D9DEE7"/>
+              <a:srgbClr val="08A6A6"/>
             </a:solidFill>
             <a:prstDash val="solid"/>
           </a:ln>
@@ -4156,14 +4420,14 @@
       </p:sp>
       <p:sp>
         <p:nvSpPr>
-          <p:cNvPr id="12" name="Text 10"/>
-          <p:cNvSpPr txBox="1"/>
-          <p:nvPr/>
-        </p:nvSpPr>
-        <p:spPr>
-          <a:xfrm>
-            <a:off x="914400" y="3236976"/>
-            <a:ext cx="9418320" cy="877824"/>
+          <p:cNvPr id="11" name="Text 9"/>
+          <p:cNvSpPr txBox="1"/>
+          <p:nvPr/>
+        </p:nvSpPr>
+        <p:spPr>
+          <a:xfrm>
+            <a:off x="6537960" y="2011680"/>
+            <a:ext cx="4754880" cy="365760"/>
           </a:xfrm>
           <a:prstGeom prst="rect">
             <a:avLst/>
@@ -4176,23 +4440,62 @@
           <a:lstStyle/>
           <a:p>
             <a:pPr indent="0" marL="0">
-              <a:lnSpc>
-                <a:spcPct val="118000"/>
-              </a:lnSpc>
-              <a:buNone/>
-            </a:pPr>
-            <a:r>
-              <a:rPr lang="en-US" sz="1700" dirty="0">
-                <a:solidFill>
-                  <a:srgbClr val="101828"/>
+              <a:buNone/>
+            </a:pPr>
+            <a:r>
+              <a:rPr lang="en-US" sz="1600" b="1" dirty="0">
+                <a:solidFill>
+                  <a:srgbClr val="08A6A6"/>
                 </a:solidFill>
                 <a:latin typeface="IBM Plex Sans" pitchFamily="34" charset="0"/>
                 <a:ea typeface="IBM Plex Sans" pitchFamily="34" charset="-122"/>
                 <a:cs typeface="IBM Plex Sans" pitchFamily="34" charset="-120"/>
               </a:rPr>
-              <a:t>Write a program that reads whole numbers until -1 is typed, then prints how many numbers were read and their total.</a:t>
-            </a:r>
-            <a:endParaRPr lang="en-US" sz="1700" dirty="0"/>
+              <a:t>Ask again politely</a:t>
+            </a:r>
+            <a:endParaRPr lang="en-US" sz="1600" dirty="0"/>
+          </a:p>
+        </p:txBody>
+      </p:sp>
+      <p:sp>
+        <p:nvSpPr>
+          <p:cNvPr id="12" name="Text 10"/>
+          <p:cNvSpPr txBox="1"/>
+          <p:nvPr/>
+        </p:nvSpPr>
+        <p:spPr>
+          <a:xfrm>
+            <a:off x="6537960" y="2395728"/>
+            <a:ext cx="4754880" cy="1005840"/>
+          </a:xfrm>
+          <a:prstGeom prst="rect">
+            <a:avLst/>
+          </a:prstGeom>
+          <a:noFill/>
+          <a:ln/>
+        </p:spPr>
+        <p:txBody>
+          <a:bodyPr wrap="square" lIns="0" tIns="0" rIns="0" bIns="0" rtlCol="0" anchor="t"/>
+          <a:lstStyle/>
+          <a:p>
+            <a:pPr indent="0" marL="0">
+              <a:lnSpc>
+                <a:spcPct val="120000"/>
+              </a:lnSpc>
+              <a:buNone/>
+            </a:pPr>
+            <a:r>
+              <a:rPr lang="en-US" sz="1300" dirty="0">
+                <a:solidFill>
+                  <a:srgbClr val="667085"/>
+                </a:solidFill>
+                <a:latin typeface="IBM Plex Sans" pitchFamily="34" charset="0"/>
+                <a:ea typeface="IBM Plex Sans" pitchFamily="34" charset="-122"/>
+                <a:cs typeface="IBM Plex Sans" pitchFamily="34" charset="-120"/>
+              </a:rPr>
+              <a:t>A good validation loop says what was wrong with the last answer, not just 'try again'.</a:t>
+            </a:r>
+            <a:endParaRPr lang="en-US" sz="1300" dirty="0"/>
           </a:p>
         </p:txBody>
       </p:sp>
@@ -4204,73 +4507,12 @@
         </p:nvSpPr>
         <p:spPr>
           <a:xfrm>
-            <a:off x="10515600" y="3429000"/>
-            <a:ext cx="868680" cy="493776"/>
+            <a:off x="502920" y="3794760"/>
+            <a:ext cx="5394960" cy="1737360"/>
           </a:xfrm>
           <a:prstGeom prst="roundRect">
             <a:avLst>
-              <a:gd name="adj" fmla="val 18519"/>
-            </a:avLst>
-          </a:prstGeom>
-          <a:solidFill>
-            <a:srgbClr val="EEF2FB"/>
-          </a:solidFill>
-          <a:ln/>
-        </p:spPr>
-      </p:sp>
-      <p:sp>
-        <p:nvSpPr>
-          <p:cNvPr id="14" name="Text 12"/>
-          <p:cNvSpPr txBox="1"/>
-          <p:nvPr/>
-        </p:nvSpPr>
-        <p:spPr>
-          <a:xfrm>
-            <a:off x="10515600" y="3429000"/>
-            <a:ext cx="868680" cy="493776"/>
-          </a:xfrm>
-          <a:prstGeom prst="rect">
-            <a:avLst/>
-          </a:prstGeom>
-          <a:noFill/>
-          <a:ln/>
-        </p:spPr>
-        <p:txBody>
-          <a:bodyPr wrap="square" lIns="0" tIns="0" rIns="0" bIns="0" rtlCol="0" anchor="ctr"/>
-          <a:lstStyle/>
-          <a:p>
-            <a:pPr algn="ctr" indent="0" marL="0">
-              <a:buNone/>
-            </a:pPr>
-            <a:r>
-              <a:rPr lang="en-US" sz="1500" b="1" dirty="0">
-                <a:solidFill>
-                  <a:srgbClr val="2D63FF"/>
-                </a:solidFill>
-                <a:latin typeface="IBM Plex Mono" pitchFamily="34" charset="0"/>
-                <a:ea typeface="IBM Plex Mono" pitchFamily="34" charset="-122"/>
-                <a:cs typeface="IBM Plex Mono" pitchFamily="34" charset="-120"/>
-              </a:rPr>
-              <a:t>[5]</a:t>
-            </a:r>
-            <a:endParaRPr lang="en-US" sz="1500" dirty="0"/>
-          </a:p>
-        </p:txBody>
-      </p:sp>
-      <p:sp>
-        <p:nvSpPr>
-          <p:cNvPr id="15" name="Shape 13"/>
-          <p:cNvSpPr/>
-          <p:nvPr/>
-        </p:nvSpPr>
-        <p:spPr>
-          <a:xfrm>
-            <a:off x="502920" y="4425696"/>
-            <a:ext cx="11155680" cy="1097280"/>
-          </a:xfrm>
-          <a:prstGeom prst="roundRect">
-            <a:avLst>
-              <a:gd name="adj" fmla="val 10000"/>
+              <a:gd name="adj" fmla="val 6316"/>
             </a:avLst>
           </a:prstGeom>
           <a:solidFill>
@@ -4278,7 +4520,7 @@
           </a:solidFill>
           <a:ln w="15875">
             <a:solidFill>
-              <a:srgbClr val="D9DEE7"/>
+              <a:srgbClr val="2D63FF"/>
             </a:solidFill>
             <a:prstDash val="solid"/>
           </a:ln>
@@ -4286,14 +4528,14 @@
       </p:sp>
       <p:sp>
         <p:nvSpPr>
-          <p:cNvPr id="16" name="Text 14"/>
-          <p:cNvSpPr txBox="1"/>
-          <p:nvPr/>
-        </p:nvSpPr>
-        <p:spPr>
-          <a:xfrm>
-            <a:off x="914400" y="4535424"/>
-            <a:ext cx="9418320" cy="877824"/>
+          <p:cNvPr id="14" name="Text 12"/>
+          <p:cNvSpPr txBox="1"/>
+          <p:nvPr/>
+        </p:nvSpPr>
+        <p:spPr>
+          <a:xfrm>
+            <a:off x="822960" y="3977640"/>
+            <a:ext cx="4754880" cy="365760"/>
           </a:xfrm>
           <a:prstGeom prst="rect">
             <a:avLst/>
@@ -4306,47 +4548,130 @@
           <a:lstStyle/>
           <a:p>
             <a:pPr indent="0" marL="0">
-              <a:lnSpc>
-                <a:spcPct val="118000"/>
-              </a:lnSpc>
-              <a:buNone/>
-            </a:pPr>
-            <a:r>
-              <a:rPr lang="en-US" sz="1700" dirty="0">
-                <a:solidFill>
-                  <a:srgbClr val="101828"/>
+              <a:buNone/>
+            </a:pPr>
+            <a:r>
+              <a:rPr lang="en-US" sz="1600" b="1" dirty="0">
+                <a:solidFill>
+                  <a:srgbClr val="2D63FF"/>
                 </a:solidFill>
                 <a:latin typeface="IBM Plex Sans" pitchFamily="34" charset="0"/>
                 <a:ea typeface="IBM Plex Sans" pitchFamily="34" charset="-122"/>
                 <a:cs typeface="IBM Plex Sans" pitchFamily="34" charset="-120"/>
               </a:rPr>
-              <a:t>Write a program that keeps asking for a word until yes or no is typed, printing please answer yes or no for every other word, and then prints the word that was accepted.</a:t>
-            </a:r>
-            <a:endParaRPr lang="en-US" sz="1700" dirty="0"/>
-          </a:p>
-        </p:txBody>
-      </p:sp>
-      <p:sp>
-        <p:nvSpPr>
-          <p:cNvPr id="17" name="Shape 15"/>
+              <a:t>Choosing a sentinel</a:t>
+            </a:r>
+            <a:endParaRPr lang="en-US" sz="1600" dirty="0"/>
+          </a:p>
+        </p:txBody>
+      </p:sp>
+      <p:sp>
+        <p:nvSpPr>
+          <p:cNvPr id="15" name="Text 13"/>
+          <p:cNvSpPr txBox="1"/>
+          <p:nvPr/>
+        </p:nvSpPr>
+        <p:spPr>
+          <a:xfrm>
+            <a:off x="822960" y="4361688"/>
+            <a:ext cx="4754880" cy="1005840"/>
+          </a:xfrm>
+          <a:prstGeom prst="rect">
+            <a:avLst/>
+          </a:prstGeom>
+          <a:noFill/>
+          <a:ln/>
+        </p:spPr>
+        <p:txBody>
+          <a:bodyPr wrap="square" lIns="0" tIns="0" rIns="0" bIns="0" rtlCol="0" anchor="t"/>
+          <a:lstStyle/>
+          <a:p>
+            <a:pPr indent="0" marL="0">
+              <a:lnSpc>
+                <a:spcPct val="120000"/>
+              </a:lnSpc>
+              <a:buNone/>
+            </a:pPr>
+            <a:r>
+              <a:rPr lang="en-US" sz="1300" dirty="0">
+                <a:solidFill>
+                  <a:srgbClr val="667085"/>
+                </a:solidFill>
+                <a:latin typeface="IBM Plex Sans" pitchFamily="34" charset="0"/>
+                <a:ea typeface="IBM Plex Sans" pitchFamily="34" charset="-122"/>
+                <a:cs typeface="IBM Plex Sans" pitchFamily="34" charset="-120"/>
+              </a:rPr>
+              <a:t>-1 works when the real values can never be negative. For a temperature it would be a terrible choice.</a:t>
+            </a:r>
+            <a:endParaRPr lang="en-US" sz="1300" dirty="0"/>
+          </a:p>
+        </p:txBody>
+      </p:sp>
+      <p:sp>
+        <p:nvSpPr>
+          <p:cNvPr id="16" name="Shape 14"/>
           <p:cNvSpPr/>
           <p:nvPr/>
         </p:nvSpPr>
         <p:spPr>
           <a:xfrm>
-            <a:off x="10515600" y="4727448"/>
-            <a:ext cx="868680" cy="493776"/>
+            <a:off x="6217920" y="3794760"/>
+            <a:ext cx="5394960" cy="1737360"/>
           </a:xfrm>
           <a:prstGeom prst="roundRect">
             <a:avLst>
-              <a:gd name="adj" fmla="val 18519"/>
+              <a:gd name="adj" fmla="val 6316"/>
             </a:avLst>
           </a:prstGeom>
           <a:solidFill>
-            <a:srgbClr val="EEF2FB"/>
+            <a:srgbClr val="FFFFFF"/>
           </a:solidFill>
-          <a:ln/>
-        </p:spPr>
+          <a:ln w="15875">
+            <a:solidFill>
+              <a:srgbClr val="08A6A6"/>
+            </a:solidFill>
+            <a:prstDash val="solid"/>
+          </a:ln>
+        </p:spPr>
+      </p:sp>
+      <p:sp>
+        <p:nvSpPr>
+          <p:cNvPr id="17" name="Text 15"/>
+          <p:cNvSpPr txBox="1"/>
+          <p:nvPr/>
+        </p:nvSpPr>
+        <p:spPr>
+          <a:xfrm>
+            <a:off x="6537960" y="3977640"/>
+            <a:ext cx="4754880" cy="365760"/>
+          </a:xfrm>
+          <a:prstGeom prst="rect">
+            <a:avLst/>
+          </a:prstGeom>
+          <a:noFill/>
+          <a:ln/>
+        </p:spPr>
+        <p:txBody>
+          <a:bodyPr wrap="square" lIns="0" tIns="0" rIns="0" bIns="0" rtlCol="0" anchor="ctr"/>
+          <a:lstStyle/>
+          <a:p>
+            <a:pPr indent="0" marL="0">
+              <a:buNone/>
+            </a:pPr>
+            <a:r>
+              <a:rPr lang="en-US" sz="1600" b="1" dirty="0">
+                <a:solidFill>
+                  <a:srgbClr val="08A6A6"/>
+                </a:solidFill>
+                <a:latin typeface="IBM Plex Sans" pitchFamily="34" charset="0"/>
+                <a:ea typeface="IBM Plex Sans" pitchFamily="34" charset="-122"/>
+                <a:cs typeface="IBM Plex Sans" pitchFamily="34" charset="-120"/>
+              </a:rPr>
+              <a:t>Count or total</a:t>
+            </a:r>
+            <a:endParaRPr lang="en-US" sz="1600" dirty="0"/>
+          </a:p>
+        </p:txBody>
       </p:sp>
       <p:sp>
         <p:nvSpPr>
@@ -4356,34 +4681,37 @@
         </p:nvSpPr>
         <p:spPr>
           <a:xfrm>
-            <a:off x="10515600" y="4727448"/>
-            <a:ext cx="868680" cy="493776"/>
-          </a:xfrm>
-          <a:prstGeom prst="rect">
-            <a:avLst/>
-          </a:prstGeom>
-          <a:noFill/>
-          <a:ln/>
-        </p:spPr>
-        <p:txBody>
-          <a:bodyPr wrap="square" lIns="0" tIns="0" rIns="0" bIns="0" rtlCol="0" anchor="ctr"/>
-          <a:lstStyle/>
-          <a:p>
-            <a:pPr algn="ctr" indent="0" marL="0">
-              <a:buNone/>
-            </a:pPr>
-            <a:r>
-              <a:rPr lang="en-US" sz="1500" b="1" dirty="0">
-                <a:solidFill>
-                  <a:srgbClr val="2D63FF"/>
-                </a:solidFill>
-                <a:latin typeface="IBM Plex Mono" pitchFamily="34" charset="0"/>
-                <a:ea typeface="IBM Plex Mono" pitchFamily="34" charset="-122"/>
-                <a:cs typeface="IBM Plex Mono" pitchFamily="34" charset="-120"/>
-              </a:rPr>
-              <a:t>[4]</a:t>
-            </a:r>
-            <a:endParaRPr lang="en-US" sz="1500" dirty="0"/>
+            <a:off x="6537960" y="4361688"/>
+            <a:ext cx="4754880" cy="1005840"/>
+          </a:xfrm>
+          <a:prstGeom prst="rect">
+            <a:avLst/>
+          </a:prstGeom>
+          <a:noFill/>
+          <a:ln/>
+        </p:spPr>
+        <p:txBody>
+          <a:bodyPr wrap="square" lIns="0" tIns="0" rIns="0" bIns="0" rtlCol="0" anchor="t"/>
+          <a:lstStyle/>
+          <a:p>
+            <a:pPr indent="0" marL="0">
+              <a:lnSpc>
+                <a:spcPct val="120000"/>
+              </a:lnSpc>
+              <a:buNone/>
+            </a:pPr>
+            <a:r>
+              <a:rPr lang="en-US" sz="1300" dirty="0">
+                <a:solidFill>
+                  <a:srgbClr val="667085"/>
+                </a:solidFill>
+                <a:latin typeface="IBM Plex Sans" pitchFamily="34" charset="0"/>
+                <a:ea typeface="IBM Plex Sans" pitchFamily="34" charset="-122"/>
+                <a:cs typeface="IBM Plex Sans" pitchFamily="34" charset="-120"/>
+              </a:rPr>
+              <a:t>A counter always adds 1. A running total adds whatever came in. Plenty of programs need both at once.</a:t>
+            </a:r>
+            <a:endParaRPr lang="en-US" sz="1300" dirty="0"/>
           </a:p>
         </p:txBody>
       </p:sp>
@@ -4398,6 +4726,604 @@
 <file path=ppt/slides/slide14.xml><?xml version="1.0" encoding="utf-8"?>
 <p:sld xmlns:a="http://schemas.openxmlformats.org/drawingml/2006/main" xmlns:r="http://schemas.openxmlformats.org/officeDocument/2006/relationships" xmlns:p="http://schemas.openxmlformats.org/presentationml/2006/main">
   <p:cSld name="Slide 14">
+    <p:bg>
+      <p:bgPr>
+        <a:solidFill>
+          <a:srgbClr val="F7F7F4"/>
+        </a:solidFill>
+      </p:bgPr>
+    </p:bg>
+    <p:spTree>
+      <p:nvGrpSpPr>
+        <p:cNvPr id="1" name=""/>
+        <p:cNvGrpSpPr/>
+        <p:nvPr/>
+      </p:nvGrpSpPr>
+      <p:grpSpPr>
+        <a:xfrm>
+          <a:off x="0" y="0"/>
+          <a:ext cx="0" cy="0"/>
+          <a:chOff x="0" y="0"/>
+          <a:chExt cx="0" cy="0"/>
+        </a:xfrm>
+      </p:grpSpPr>
+      <p:sp>
+        <p:nvSpPr>
+          <p:cNvPr id="2" name="Shape 0"/>
+          <p:cNvSpPr/>
+          <p:nvPr/>
+        </p:nvSpPr>
+        <p:spPr>
+          <a:xfrm>
+            <a:off x="0" y="0"/>
+            <a:ext cx="12188952" cy="82296"/>
+          </a:xfrm>
+          <a:prstGeom prst="rect">
+            <a:avLst/>
+          </a:prstGeom>
+          <a:solidFill>
+            <a:srgbClr val="2D63FF"/>
+          </a:solidFill>
+          <a:ln/>
+        </p:spPr>
+      </p:sp>
+      <p:sp>
+        <p:nvSpPr>
+          <p:cNvPr id="3" name="Text 1"/>
+          <p:cNvSpPr txBox="1"/>
+          <p:nvPr/>
+        </p:nvSpPr>
+        <p:spPr>
+          <a:xfrm>
+            <a:off x="502920" y="6236208"/>
+            <a:ext cx="7772400" cy="365760"/>
+          </a:xfrm>
+          <a:prstGeom prst="rect">
+            <a:avLst/>
+          </a:prstGeom>
+          <a:noFill/>
+          <a:ln/>
+        </p:spPr>
+        <p:txBody>
+          <a:bodyPr wrap="square" lIns="0" tIns="0" rIns="0" bIns="0" rtlCol="0" anchor="ctr"/>
+          <a:lstStyle/>
+          <a:p>
+            <a:pPr indent="0" marL="0">
+              <a:buNone/>
+            </a:pPr>
+            <a:r>
+              <a:rPr lang="en-US" sz="1100" dirty="0">
+                <a:solidFill>
+                  <a:srgbClr val="667085"/>
+                </a:solidFill>
+                <a:latin typeface="IBM Plex Mono" pitchFamily="34" charset="0"/>
+                <a:ea typeface="IBM Plex Mono" pitchFamily="34" charset="-122"/>
+                <a:cs typeface="IBM Plex Mono" pitchFamily="34" charset="-120"/>
+              </a:rPr>
+              <a:t>Python programming  |  Lesson 5</a:t>
+            </a:r>
+            <a:endParaRPr lang="en-US" sz="1100" dirty="0"/>
+          </a:p>
+        </p:txBody>
+      </p:sp>
+      <p:sp>
+        <p:nvSpPr>
+          <p:cNvPr id="4" name="Text 2"/>
+          <p:cNvSpPr txBox="1"/>
+          <p:nvPr/>
+        </p:nvSpPr>
+        <p:spPr>
+          <a:xfrm>
+            <a:off x="9326880" y="6236208"/>
+            <a:ext cx="2377440" cy="365760"/>
+          </a:xfrm>
+          <a:prstGeom prst="rect">
+            <a:avLst/>
+          </a:prstGeom>
+          <a:noFill/>
+          <a:ln/>
+        </p:spPr>
+        <p:txBody>
+          <a:bodyPr wrap="square" lIns="0" tIns="0" rIns="0" bIns="0" rtlCol="0" anchor="ctr"/>
+          <a:lstStyle/>
+          <a:p>
+            <a:pPr algn="r" indent="0" marL="0">
+              <a:buNone/>
+            </a:pPr>
+            <a:r>
+              <a:rPr lang="en-US" sz="1100" dirty="0">
+                <a:solidFill>
+                  <a:srgbClr val="667085"/>
+                </a:solidFill>
+                <a:latin typeface="IBM Plex Mono" pitchFamily="34" charset="0"/>
+                <a:ea typeface="IBM Plex Mono" pitchFamily="34" charset="-122"/>
+                <a:cs typeface="IBM Plex Mono" pitchFamily="34" charset="-120"/>
+              </a:rPr>
+              <a:t>Revise 360</a:t>
+            </a:r>
+            <a:endParaRPr lang="en-US" sz="1100" dirty="0"/>
+          </a:p>
+        </p:txBody>
+      </p:sp>
+      <p:sp>
+        <p:nvSpPr>
+          <p:cNvPr id="5" name="Text 3"/>
+          <p:cNvSpPr txBox="1"/>
+          <p:nvPr/>
+        </p:nvSpPr>
+        <p:spPr>
+          <a:xfrm>
+            <a:off x="502920" y="411480"/>
+            <a:ext cx="11155680" cy="777240"/>
+          </a:xfrm>
+          <a:prstGeom prst="rect">
+            <a:avLst/>
+          </a:prstGeom>
+          <a:noFill/>
+          <a:ln/>
+        </p:spPr>
+        <p:txBody>
+          <a:bodyPr wrap="square" lIns="0" tIns="0" rIns="0" bIns="0" rtlCol="0" anchor="ctr"/>
+          <a:lstStyle/>
+          <a:p>
+            <a:pPr indent="0" marL="0">
+              <a:buNone/>
+            </a:pPr>
+            <a:r>
+              <a:rPr lang="en-US" sz="3200" b="1" dirty="0">
+                <a:solidFill>
+                  <a:srgbClr val="101828"/>
+                </a:solidFill>
+                <a:latin typeface="IBM Plex Sans" pitchFamily="34" charset="0"/>
+                <a:ea typeface="IBM Plex Sans" pitchFamily="34" charset="-122"/>
+                <a:cs typeface="IBM Plex Sans" pitchFamily="34" charset="-120"/>
+              </a:rPr>
+              <a:t>Exam practice</a:t>
+            </a:r>
+            <a:endParaRPr lang="en-US" sz="3200" dirty="0"/>
+          </a:p>
+        </p:txBody>
+      </p:sp>
+      <p:sp>
+        <p:nvSpPr>
+          <p:cNvPr id="6" name="Text 4"/>
+          <p:cNvSpPr txBox="1"/>
+          <p:nvPr/>
+        </p:nvSpPr>
+        <p:spPr>
+          <a:xfrm>
+            <a:off x="502920" y="1170432"/>
+            <a:ext cx="11155680" cy="411480"/>
+          </a:xfrm>
+          <a:prstGeom prst="rect">
+            <a:avLst/>
+          </a:prstGeom>
+          <a:noFill/>
+          <a:ln/>
+        </p:spPr>
+        <p:txBody>
+          <a:bodyPr wrap="square" lIns="0" tIns="0" rIns="0" bIns="0" rtlCol="0" anchor="ctr"/>
+          <a:lstStyle/>
+          <a:p>
+            <a:pPr indent="0" marL="0">
+              <a:buNone/>
+            </a:pPr>
+            <a:r>
+              <a:rPr lang="en-US" sz="1500" dirty="0">
+                <a:solidFill>
+                  <a:srgbClr val="667085"/>
+                </a:solidFill>
+                <a:latin typeface="IBM Plex Sans" pitchFamily="34" charset="0"/>
+                <a:ea typeface="IBM Plex Sans" pitchFamily="34" charset="-122"/>
+                <a:cs typeface="IBM Plex Sans" pitchFamily="34" charset="-120"/>
+              </a:rPr>
+              <a:t>Devices away. Answer from memory on the worksheet.</a:t>
+            </a:r>
+            <a:endParaRPr lang="en-US" sz="1500" dirty="0"/>
+          </a:p>
+        </p:txBody>
+      </p:sp>
+      <p:sp>
+        <p:nvSpPr>
+          <p:cNvPr id="7" name="Shape 5"/>
+          <p:cNvSpPr/>
+          <p:nvPr/>
+        </p:nvSpPr>
+        <p:spPr>
+          <a:xfrm>
+            <a:off x="502920" y="1828800"/>
+            <a:ext cx="11155680" cy="1097280"/>
+          </a:xfrm>
+          <a:prstGeom prst="roundRect">
+            <a:avLst>
+              <a:gd name="adj" fmla="val 10000"/>
+            </a:avLst>
+          </a:prstGeom>
+          <a:solidFill>
+            <a:srgbClr val="FFFFFF"/>
+          </a:solidFill>
+          <a:ln w="15875">
+            <a:solidFill>
+              <a:srgbClr val="D9DEE7"/>
+            </a:solidFill>
+            <a:prstDash val="solid"/>
+          </a:ln>
+        </p:spPr>
+      </p:sp>
+      <p:sp>
+        <p:nvSpPr>
+          <p:cNvPr id="8" name="Text 6"/>
+          <p:cNvSpPr txBox="1"/>
+          <p:nvPr/>
+        </p:nvSpPr>
+        <p:spPr>
+          <a:xfrm>
+            <a:off x="914400" y="1938528"/>
+            <a:ext cx="9418320" cy="877824"/>
+          </a:xfrm>
+          <a:prstGeom prst="rect">
+            <a:avLst/>
+          </a:prstGeom>
+          <a:noFill/>
+          <a:ln/>
+        </p:spPr>
+        <p:txBody>
+          <a:bodyPr wrap="square" lIns="0" tIns="0" rIns="0" bIns="0" rtlCol="0" anchor="ctr"/>
+          <a:lstStyle/>
+          <a:p>
+            <a:pPr indent="0" marL="0">
+              <a:lnSpc>
+                <a:spcPct val="118000"/>
+              </a:lnSpc>
+              <a:buNone/>
+            </a:pPr>
+            <a:r>
+              <a:rPr lang="en-US" sz="1700" dirty="0">
+                <a:solidFill>
+                  <a:srgbClr val="101828"/>
+                </a:solidFill>
+                <a:latin typeface="IBM Plex Sans" pitchFamily="34" charset="0"/>
+                <a:ea typeface="IBM Plex Sans" pitchFamily="34" charset="-122"/>
+                <a:cs typeface="IBM Plex Sans" pitchFamily="34" charset="-120"/>
+              </a:rPr>
+              <a:t>A validation loop reads a whole number, then repeats for as long as it is outside 1 to 20. When 99 is typed the program prints out of range over and over. State what has been left out of the loop, and where in the loop it belongs.</a:t>
+            </a:r>
+            <a:endParaRPr lang="en-US" sz="1700" dirty="0"/>
+          </a:p>
+        </p:txBody>
+      </p:sp>
+      <p:sp>
+        <p:nvSpPr>
+          <p:cNvPr id="9" name="Shape 7"/>
+          <p:cNvSpPr/>
+          <p:nvPr/>
+        </p:nvSpPr>
+        <p:spPr>
+          <a:xfrm>
+            <a:off x="10515600" y="2130552"/>
+            <a:ext cx="868680" cy="493776"/>
+          </a:xfrm>
+          <a:prstGeom prst="roundRect">
+            <a:avLst>
+              <a:gd name="adj" fmla="val 18519"/>
+            </a:avLst>
+          </a:prstGeom>
+          <a:solidFill>
+            <a:srgbClr val="EEF2FB"/>
+          </a:solidFill>
+          <a:ln/>
+        </p:spPr>
+      </p:sp>
+      <p:sp>
+        <p:nvSpPr>
+          <p:cNvPr id="10" name="Text 8"/>
+          <p:cNvSpPr txBox="1"/>
+          <p:nvPr/>
+        </p:nvSpPr>
+        <p:spPr>
+          <a:xfrm>
+            <a:off x="10515600" y="2130552"/>
+            <a:ext cx="868680" cy="493776"/>
+          </a:xfrm>
+          <a:prstGeom prst="rect">
+            <a:avLst/>
+          </a:prstGeom>
+          <a:noFill/>
+          <a:ln/>
+        </p:spPr>
+        <p:txBody>
+          <a:bodyPr wrap="square" lIns="0" tIns="0" rIns="0" bIns="0" rtlCol="0" anchor="ctr"/>
+          <a:lstStyle/>
+          <a:p>
+            <a:pPr algn="ctr" indent="0" marL="0">
+              <a:buNone/>
+            </a:pPr>
+            <a:r>
+              <a:rPr lang="en-US" sz="1500" b="1" dirty="0">
+                <a:solidFill>
+                  <a:srgbClr val="2D63FF"/>
+                </a:solidFill>
+                <a:latin typeface="IBM Plex Mono" pitchFamily="34" charset="0"/>
+                <a:ea typeface="IBM Plex Mono" pitchFamily="34" charset="-122"/>
+                <a:cs typeface="IBM Plex Mono" pitchFamily="34" charset="-120"/>
+              </a:rPr>
+              <a:t>[2]</a:t>
+            </a:r>
+            <a:endParaRPr lang="en-US" sz="1500" dirty="0"/>
+          </a:p>
+        </p:txBody>
+      </p:sp>
+      <p:sp>
+        <p:nvSpPr>
+          <p:cNvPr id="11" name="Shape 9"/>
+          <p:cNvSpPr/>
+          <p:nvPr/>
+        </p:nvSpPr>
+        <p:spPr>
+          <a:xfrm>
+            <a:off x="502920" y="3127248"/>
+            <a:ext cx="11155680" cy="1097280"/>
+          </a:xfrm>
+          <a:prstGeom prst="roundRect">
+            <a:avLst>
+              <a:gd name="adj" fmla="val 10000"/>
+            </a:avLst>
+          </a:prstGeom>
+          <a:solidFill>
+            <a:srgbClr val="FFFFFF"/>
+          </a:solidFill>
+          <a:ln w="15875">
+            <a:solidFill>
+              <a:srgbClr val="D9DEE7"/>
+            </a:solidFill>
+            <a:prstDash val="solid"/>
+          </a:ln>
+        </p:spPr>
+      </p:sp>
+      <p:sp>
+        <p:nvSpPr>
+          <p:cNvPr id="12" name="Text 10"/>
+          <p:cNvSpPr txBox="1"/>
+          <p:nvPr/>
+        </p:nvSpPr>
+        <p:spPr>
+          <a:xfrm>
+            <a:off x="914400" y="3236976"/>
+            <a:ext cx="9418320" cy="877824"/>
+          </a:xfrm>
+          <a:prstGeom prst="rect">
+            <a:avLst/>
+          </a:prstGeom>
+          <a:noFill/>
+          <a:ln/>
+        </p:spPr>
+        <p:txBody>
+          <a:bodyPr wrap="square" lIns="0" tIns="0" rIns="0" bIns="0" rtlCol="0" anchor="ctr"/>
+          <a:lstStyle/>
+          <a:p>
+            <a:pPr indent="0" marL="0">
+              <a:lnSpc>
+                <a:spcPct val="118000"/>
+              </a:lnSpc>
+              <a:buNone/>
+            </a:pPr>
+            <a:r>
+              <a:rPr lang="en-US" sz="1700" dirty="0">
+                <a:solidFill>
+                  <a:srgbClr val="101828"/>
+                </a:solidFill>
+                <a:latin typeface="IBM Plex Sans" pitchFamily="34" charset="0"/>
+                <a:ea typeface="IBM Plex Sans" pitchFamily="34" charset="-122"/>
+                <a:cs typeface="IBM Plex Sans" pitchFamily="34" charset="-120"/>
+              </a:rPr>
+              <a:t>Write a program that reads whole numbers until -1 is typed, then prints how many numbers were read and their total.</a:t>
+            </a:r>
+            <a:endParaRPr lang="en-US" sz="1700" dirty="0"/>
+          </a:p>
+        </p:txBody>
+      </p:sp>
+      <p:sp>
+        <p:nvSpPr>
+          <p:cNvPr id="13" name="Shape 11"/>
+          <p:cNvSpPr/>
+          <p:nvPr/>
+        </p:nvSpPr>
+        <p:spPr>
+          <a:xfrm>
+            <a:off x="10515600" y="3429000"/>
+            <a:ext cx="868680" cy="493776"/>
+          </a:xfrm>
+          <a:prstGeom prst="roundRect">
+            <a:avLst>
+              <a:gd name="adj" fmla="val 18519"/>
+            </a:avLst>
+          </a:prstGeom>
+          <a:solidFill>
+            <a:srgbClr val="EEF2FB"/>
+          </a:solidFill>
+          <a:ln/>
+        </p:spPr>
+      </p:sp>
+      <p:sp>
+        <p:nvSpPr>
+          <p:cNvPr id="14" name="Text 12"/>
+          <p:cNvSpPr txBox="1"/>
+          <p:nvPr/>
+        </p:nvSpPr>
+        <p:spPr>
+          <a:xfrm>
+            <a:off x="10515600" y="3429000"/>
+            <a:ext cx="868680" cy="493776"/>
+          </a:xfrm>
+          <a:prstGeom prst="rect">
+            <a:avLst/>
+          </a:prstGeom>
+          <a:noFill/>
+          <a:ln/>
+        </p:spPr>
+        <p:txBody>
+          <a:bodyPr wrap="square" lIns="0" tIns="0" rIns="0" bIns="0" rtlCol="0" anchor="ctr"/>
+          <a:lstStyle/>
+          <a:p>
+            <a:pPr algn="ctr" indent="0" marL="0">
+              <a:buNone/>
+            </a:pPr>
+            <a:r>
+              <a:rPr lang="en-US" sz="1500" b="1" dirty="0">
+                <a:solidFill>
+                  <a:srgbClr val="2D63FF"/>
+                </a:solidFill>
+                <a:latin typeface="IBM Plex Mono" pitchFamily="34" charset="0"/>
+                <a:ea typeface="IBM Plex Mono" pitchFamily="34" charset="-122"/>
+                <a:cs typeface="IBM Plex Mono" pitchFamily="34" charset="-120"/>
+              </a:rPr>
+              <a:t>[5]</a:t>
+            </a:r>
+            <a:endParaRPr lang="en-US" sz="1500" dirty="0"/>
+          </a:p>
+        </p:txBody>
+      </p:sp>
+      <p:sp>
+        <p:nvSpPr>
+          <p:cNvPr id="15" name="Shape 13"/>
+          <p:cNvSpPr/>
+          <p:nvPr/>
+        </p:nvSpPr>
+        <p:spPr>
+          <a:xfrm>
+            <a:off x="502920" y="4425696"/>
+            <a:ext cx="11155680" cy="1097280"/>
+          </a:xfrm>
+          <a:prstGeom prst="roundRect">
+            <a:avLst>
+              <a:gd name="adj" fmla="val 10000"/>
+            </a:avLst>
+          </a:prstGeom>
+          <a:solidFill>
+            <a:srgbClr val="FFFFFF"/>
+          </a:solidFill>
+          <a:ln w="15875">
+            <a:solidFill>
+              <a:srgbClr val="D9DEE7"/>
+            </a:solidFill>
+            <a:prstDash val="solid"/>
+          </a:ln>
+        </p:spPr>
+      </p:sp>
+      <p:sp>
+        <p:nvSpPr>
+          <p:cNvPr id="16" name="Text 14"/>
+          <p:cNvSpPr txBox="1"/>
+          <p:nvPr/>
+        </p:nvSpPr>
+        <p:spPr>
+          <a:xfrm>
+            <a:off x="914400" y="4535424"/>
+            <a:ext cx="9418320" cy="877824"/>
+          </a:xfrm>
+          <a:prstGeom prst="rect">
+            <a:avLst/>
+          </a:prstGeom>
+          <a:noFill/>
+          <a:ln/>
+        </p:spPr>
+        <p:txBody>
+          <a:bodyPr wrap="square" lIns="0" tIns="0" rIns="0" bIns="0" rtlCol="0" anchor="ctr"/>
+          <a:lstStyle/>
+          <a:p>
+            <a:pPr indent="0" marL="0">
+              <a:lnSpc>
+                <a:spcPct val="118000"/>
+              </a:lnSpc>
+              <a:buNone/>
+            </a:pPr>
+            <a:r>
+              <a:rPr lang="en-US" sz="1700" dirty="0">
+                <a:solidFill>
+                  <a:srgbClr val="101828"/>
+                </a:solidFill>
+                <a:latin typeface="IBM Plex Sans" pitchFamily="34" charset="0"/>
+                <a:ea typeface="IBM Plex Sans" pitchFamily="34" charset="-122"/>
+                <a:cs typeface="IBM Plex Sans" pitchFamily="34" charset="-120"/>
+              </a:rPr>
+              <a:t>Write a program that keeps asking for a word until yes or no is typed, printing please answer yes or no for every other word, and then prints the word that was accepted.</a:t>
+            </a:r>
+            <a:endParaRPr lang="en-US" sz="1700" dirty="0"/>
+          </a:p>
+        </p:txBody>
+      </p:sp>
+      <p:sp>
+        <p:nvSpPr>
+          <p:cNvPr id="17" name="Shape 15"/>
+          <p:cNvSpPr/>
+          <p:nvPr/>
+        </p:nvSpPr>
+        <p:spPr>
+          <a:xfrm>
+            <a:off x="10515600" y="4727448"/>
+            <a:ext cx="868680" cy="493776"/>
+          </a:xfrm>
+          <a:prstGeom prst="roundRect">
+            <a:avLst>
+              <a:gd name="adj" fmla="val 18519"/>
+            </a:avLst>
+          </a:prstGeom>
+          <a:solidFill>
+            <a:srgbClr val="EEF2FB"/>
+          </a:solidFill>
+          <a:ln/>
+        </p:spPr>
+      </p:sp>
+      <p:sp>
+        <p:nvSpPr>
+          <p:cNvPr id="18" name="Text 16"/>
+          <p:cNvSpPr txBox="1"/>
+          <p:nvPr/>
+        </p:nvSpPr>
+        <p:spPr>
+          <a:xfrm>
+            <a:off x="10515600" y="4727448"/>
+            <a:ext cx="868680" cy="493776"/>
+          </a:xfrm>
+          <a:prstGeom prst="rect">
+            <a:avLst/>
+          </a:prstGeom>
+          <a:noFill/>
+          <a:ln/>
+        </p:spPr>
+        <p:txBody>
+          <a:bodyPr wrap="square" lIns="0" tIns="0" rIns="0" bIns="0" rtlCol="0" anchor="ctr"/>
+          <a:lstStyle/>
+          <a:p>
+            <a:pPr algn="ctr" indent="0" marL="0">
+              <a:buNone/>
+            </a:pPr>
+            <a:r>
+              <a:rPr lang="en-US" sz="1500" b="1" dirty="0">
+                <a:solidFill>
+                  <a:srgbClr val="2D63FF"/>
+                </a:solidFill>
+                <a:latin typeface="IBM Plex Mono" pitchFamily="34" charset="0"/>
+                <a:ea typeface="IBM Plex Mono" pitchFamily="34" charset="-122"/>
+                <a:cs typeface="IBM Plex Mono" pitchFamily="34" charset="-120"/>
+              </a:rPr>
+              <a:t>[4]</a:t>
+            </a:r>
+            <a:endParaRPr lang="en-US" sz="1500" dirty="0"/>
+          </a:p>
+        </p:txBody>
+      </p:sp>
+    </p:spTree>
+  </p:cSld>
+  <p:clrMapOvr>
+    <a:masterClrMapping/>
+  </p:clrMapOvr>
+</p:sld>
+</file>
+
+<file path=ppt/slides/slide15.xml><?xml version="1.0" encoding="utf-8"?>
+<p:sld xmlns:a="http://schemas.openxmlformats.org/drawingml/2006/main" xmlns:r="http://schemas.openxmlformats.org/officeDocument/2006/relationships" xmlns:p="http://schemas.openxmlformats.org/presentationml/2006/main">
+  <p:cSld name="Slide 15">
     <p:bg>
       <p:bgPr>
         <a:solidFill>
